--- a/提案資料/WineBank_ワインマイル経済圏構想_黒背景版.pptx
+++ b/提案資料/WineBank_ワインマイル経済圏構想_黒背景版.pptx
@@ -2375,7 +2375,7 @@
           <a:p>
             <a:r>
               <a:rPr lang="en-US" dirty="0"/>
-              <a:t>中谷氏のご指摘への回答スライド。要点は「両方ともAUMに比例するので比率が固定される」という構造の話。</a:t>
+              <a:t>従来「継続収支+86万/年」としていたのは保管料1.5%の控除漏れ。正しくは現金ベース▲64万/年、成功報酬の発生を含めて+105万/年。</a:t>
             </a:r>
             <a:endParaRPr lang="en-US" dirty="0"/>
           </a:p>
@@ -9335,7 +9335,7 @@
                 <a:ea typeface="Meiryo" pitchFamily="34" charset="-122"/>
                 <a:cs typeface="Meiryo" pitchFamily="34" charset="-120"/>
               </a:rPr>
-              <a:t>損益分岐は 67.9%</a:t>
+              <a:t>損益分岐は 2つあります</a:t>
             </a:r>
             <a:endParaRPr lang="en-US" sz="1700" dirty="0"/>
           </a:p>
@@ -9377,7 +9377,7 @@
                 <a:ea typeface="Meiryo" pitchFamily="34" charset="-122"/>
                 <a:cs typeface="Meiryo" pitchFamily="34" charset="-120"/>
               </a:rPr>
-              <a:t>管理手数料250万 ÷ マイル発行368万。加重平均の原価率がこれを下回れば、単体でも継続収支は黒字です。想定ミックスは44.5%で、23ポイントの余裕があります。</a:t>
+              <a:t>現金ベース（手数料2.5%−保管1.5%）÷ 発行3.68% ＝ 27.2%。成功報酬（年1.5%相当）を含めると 73.1%。想定ミックスの44.5%は、現金では届かず、成功報酬込みなら29ポイントの余裕があります。</a:t>
             </a:r>
             <a:endParaRPr lang="en-US" sz="1050" dirty="0"/>
           </a:p>
@@ -9450,7 +9450,7 @@
                 <a:ea typeface="Meiryo" pitchFamily="34" charset="-122"/>
                 <a:cs typeface="Meiryo" pitchFamily="34" charset="-120"/>
               </a:rPr>
-              <a:t>赤字になるのは、たった一つの場合だけ</a:t>
+              <a:t>だからこそ、どこで使わせるかを設計する</a:t>
             </a:r>
             <a:endParaRPr lang="en-US" sz="1500" dirty="0"/>
           </a:p>
@@ -9492,7 +9492,7 @@
                 <a:ea typeface="Meiryo" pitchFamily="34" charset="-122"/>
                 <a:cs typeface="Meiryo" pitchFamily="34" charset="-120"/>
               </a:rPr>
-              <a:t>全額を系列店の1.0円で使われた場合のみ90%となり、継続▲81万/年。逆に言えば、どこで使わせるかの設計が、そのまま収支になります。</a:t>
+              <a:t>原価ゼロのオークション・CLUB充当へ誘導できれば33.2%まで下がり、現金ベースの赤字も縮みます。全額を系列店1.0円で使われると90%となり、成功報酬を含めても赤字です。</a:t>
             </a:r>
             <a:endParaRPr lang="en-US" sz="1050" dirty="0"/>
           </a:p>
@@ -38653,7 +38653,7 @@
                 <a:ea typeface="Meiryo" pitchFamily="34" charset="-122"/>
                 <a:cs typeface="Meiryo" pitchFamily="34" charset="-120"/>
               </a:rPr>
-              <a:t>自社で持つと 年▲450万（金利300＋保管150）。会員に持たせて預かると 年+86万（手数料250−マイル164）。同じワインで、年536万ひっくり返ります。加えて成功報酬が5年後846万。</a:t>
+              <a:t>自社で持つと 年▲450万（金利300＋保管150）。会員に持たせて預かると、現金ベースは▲64万（手数料250−保管150−マイル164）ですが、成功報酬が年169万発生します。差引 年+105万。同じワインで年555万ひっくり返ります。</a:t>
             </a:r>
             <a:endParaRPr lang="en-US" sz="1050" dirty="0"/>
           </a:p>
@@ -38909,16 +38909,16 @@
             <a:tbl>
               <a:tblPr/>
               <a:tblGrid>
-                <a:gridCol w="1005840"/>
-                <a:gridCol w="1737360"/>
-                <a:gridCol w="1280160"/>
-                <a:gridCol w="1645920"/>
-                <a:gridCol w="1645920"/>
+                <a:gridCol w="822960"/>
+                <a:gridCol w="1554480"/>
+                <a:gridCol w="1188720"/>
+                <a:gridCol w="1554480"/>
+                <a:gridCol w="1463040"/>
                 <a:gridCol w="1463040"/>
                 <a:gridCol w="1371600"/>
-                <a:gridCol w="877824"/>
+                <a:gridCol w="1609344"/>
               </a:tblGrid>
-              <a:tr h="438912">
+              <a:tr h="457200">
                 <a:tc>
                   <a:txBody>
                     <a:bodyPr/>
@@ -39208,7 +39208,164 @@
                           <a:ea typeface="Meiryo" pitchFamily="34" charset="-122"/>
                           <a:cs typeface="Meiryo" pitchFamily="34" charset="-120"/>
                         </a:rPr>
+                        <a:t>保管・保険</a:t>
+                      </a:r>
+                      <a:endParaRPr lang="en-US" sz="1100" dirty="0">
+                        <a:latin typeface="Meiryo" charset="0"/>
+                        <a:ea typeface="Meiryo" charset="0"/>
+                        <a:cs typeface="Meiryo" charset="0"/>
+                      </a:endParaRPr>
+                    </a:p>
+                  </a:txBody>
+                  <a:tcPr marL="91440" marR="91440" marT="45720" marB="45720" anchor="ctr">
+                    <a:lnL w="9525" cap="flat" cmpd="sng" algn="ctr">
+                      <a:solidFill>
+                        <a:srgbClr val="4A3038"/>
+                      </a:solidFill>
+                      <a:prstDash val="solid"/>
+                      <a:round/>
+                      <a:headEnd type="none" w="med" len="med"/>
+                      <a:tailEnd type="none" w="med" len="med"/>
+                    </a:lnL>
+                    <a:lnR w="9525" cap="flat" cmpd="sng" algn="ctr">
+                      <a:solidFill>
+                        <a:srgbClr val="4A3038"/>
+                      </a:solidFill>
+                      <a:prstDash val="solid"/>
+                      <a:round/>
+                      <a:headEnd type="none" w="med" len="med"/>
+                      <a:tailEnd type="none" w="med" len="med"/>
+                    </a:lnR>
+                    <a:lnT w="9525" cap="flat" cmpd="sng" algn="ctr">
+                      <a:solidFill>
+                        <a:srgbClr val="4A3038"/>
+                      </a:solidFill>
+                      <a:prstDash val="solid"/>
+                      <a:round/>
+                      <a:headEnd type="none" w="med" len="med"/>
+                      <a:tailEnd type="none" w="med" len="med"/>
+                    </a:lnT>
+                    <a:lnB w="9525" cap="flat" cmpd="sng" algn="ctr">
+                      <a:solidFill>
+                        <a:srgbClr val="4A3038"/>
+                      </a:solidFill>
+                      <a:prstDash val="solid"/>
+                      <a:round/>
+                      <a:headEnd type="none" w="med" len="med"/>
+                      <a:tailEnd type="none" w="med" len="med"/>
+                    </a:lnB>
+                    <a:solidFill>
+                      <a:srgbClr val="7B1E3A"/>
+                    </a:solidFill>
+                  </a:tcPr>
+                </a:tc>
+                <a:tc>
+                  <a:txBody>
+                    <a:bodyPr/>
+                    <a:lstStyle/>
+                    <a:p>
+                      <a:pPr algn="ctr" indent="0" marL="0">
+                        <a:buNone/>
+                      </a:pPr>
+                      <a:r>
+                        <a:rPr lang="en-US" sz="1100" b="1" dirty="0">
+                          <a:solidFill>
+                            <a:srgbClr val="F2EDE6"/>
+                          </a:solidFill>
+                          <a:latin typeface="Meiryo" pitchFamily="34" charset="0"/>
+                          <a:ea typeface="Meiryo" pitchFamily="34" charset="-122"/>
+                          <a:cs typeface="Meiryo" pitchFamily="34" charset="-120"/>
+                        </a:rPr>
                         <a:t>マイル費用</a:t>
+                      </a:r>
+                      <a:endParaRPr lang="en-US" sz="1100" dirty="0">
+                        <a:latin typeface="Meiryo" charset="0"/>
+                        <a:ea typeface="Meiryo" charset="0"/>
+                        <a:cs typeface="Meiryo" charset="0"/>
+                      </a:endParaRPr>
+                    </a:p>
+                  </a:txBody>
+                  <a:tcPr marL="91440" marR="91440" marT="45720" marB="45720" anchor="ctr">
+                    <a:lnL w="9525" cap="flat" cmpd="sng" algn="ctr">
+                      <a:solidFill>
+                        <a:srgbClr val="4A3038"/>
+                      </a:solidFill>
+                      <a:prstDash val="solid"/>
+                      <a:round/>
+                      <a:headEnd type="none" w="med" len="med"/>
+                      <a:tailEnd type="none" w="med" len="med"/>
+                    </a:lnL>
+                    <a:lnR w="9525" cap="flat" cmpd="sng" algn="ctr">
+                      <a:solidFill>
+                        <a:srgbClr val="4A3038"/>
+                      </a:solidFill>
+                      <a:prstDash val="solid"/>
+                      <a:round/>
+                      <a:headEnd type="none" w="med" len="med"/>
+                      <a:tailEnd type="none" w="med" len="med"/>
+                    </a:lnR>
+                    <a:lnT w="9525" cap="flat" cmpd="sng" algn="ctr">
+                      <a:solidFill>
+                        <a:srgbClr val="4A3038"/>
+                      </a:solidFill>
+                      <a:prstDash val="solid"/>
+                      <a:round/>
+                      <a:headEnd type="none" w="med" len="med"/>
+                      <a:tailEnd type="none" w="med" len="med"/>
+                    </a:lnT>
+                    <a:lnB w="9525" cap="flat" cmpd="sng" algn="ctr">
+                      <a:solidFill>
+                        <a:srgbClr val="4A3038"/>
+                      </a:solidFill>
+                      <a:prstDash val="solid"/>
+                      <a:round/>
+                      <a:headEnd type="none" w="med" len="med"/>
+                      <a:tailEnd type="none" w="med" len="med"/>
+                    </a:lnB>
+                    <a:solidFill>
+                      <a:srgbClr val="7B1E3A"/>
+                    </a:solidFill>
+                  </a:tcPr>
+                </a:tc>
+                <a:tc>
+                  <a:txBody>
+                    <a:bodyPr/>
+                    <a:lstStyle/>
+                    <a:p>
+                      <a:pPr algn="ctr" indent="0" marL="0">
+                        <a:buNone/>
+                      </a:pPr>
+                      <a:r>
+                        <a:rPr lang="en-US" sz="1100" b="1" dirty="0">
+                          <a:solidFill>
+                            <a:srgbClr val="F2EDE6"/>
+                          </a:solidFill>
+                          <a:latin typeface="Meiryo" pitchFamily="34" charset="0"/>
+                          <a:ea typeface="Meiryo" pitchFamily="34" charset="-122"/>
+                          <a:cs typeface="Meiryo" pitchFamily="34" charset="-120"/>
+                        </a:rPr>
+                        <a:t>成功報酬</a:t>
+                      </a:r>
+                      <a:endParaRPr lang="en-US" sz="1100" dirty="0">
+                        <a:latin typeface="Meiryo" charset="0"/>
+                        <a:ea typeface="Meiryo" charset="0"/>
+                        <a:cs typeface="Meiryo" charset="0"/>
+                      </a:endParaRPr>
+                    </a:p>
+                    <a:p>
+                      <a:pPr algn="ctr" indent="0" marL="0">
+                        <a:buNone/>
+                      </a:pPr>
+                      <a:r>
+                        <a:rPr lang="en-US" sz="1100" b="1" dirty="0">
+                          <a:solidFill>
+                            <a:srgbClr val="F2EDE6"/>
+                          </a:solidFill>
+                          <a:latin typeface="Meiryo" pitchFamily="34" charset="0"/>
+                          <a:ea typeface="Meiryo" pitchFamily="34" charset="-122"/>
+                          <a:cs typeface="Meiryo" pitchFamily="34" charset="-120"/>
+                        </a:rPr>
+                        <a:t>（発生）</a:t>
                       </a:r>
                       <a:endParaRPr lang="en-US" sz="1100" dirty="0">
                         <a:latin typeface="Meiryo" charset="0"/>
@@ -39277,142 +39434,6 @@
                           <a:cs typeface="Meiryo" pitchFamily="34" charset="-120"/>
                         </a:rPr>
                         <a:t>年間計</a:t>
-                      </a:r>
-                      <a:endParaRPr lang="en-US" sz="1100" dirty="0">
-                        <a:latin typeface="Meiryo" charset="0"/>
-                        <a:ea typeface="Meiryo" charset="0"/>
-                        <a:cs typeface="Meiryo" charset="0"/>
-                      </a:endParaRPr>
-                    </a:p>
-                  </a:txBody>
-                  <a:tcPr marL="91440" marR="91440" marT="45720" marB="45720" anchor="ctr">
-                    <a:lnL w="9525" cap="flat" cmpd="sng" algn="ctr">
-                      <a:solidFill>
-                        <a:srgbClr val="4A3038"/>
-                      </a:solidFill>
-                      <a:prstDash val="solid"/>
-                      <a:round/>
-                      <a:headEnd type="none" w="med" len="med"/>
-                      <a:tailEnd type="none" w="med" len="med"/>
-                    </a:lnL>
-                    <a:lnR w="9525" cap="flat" cmpd="sng" algn="ctr">
-                      <a:solidFill>
-                        <a:srgbClr val="4A3038"/>
-                      </a:solidFill>
-                      <a:prstDash val="solid"/>
-                      <a:round/>
-                      <a:headEnd type="none" w="med" len="med"/>
-                      <a:tailEnd type="none" w="med" len="med"/>
-                    </a:lnR>
-                    <a:lnT w="9525" cap="flat" cmpd="sng" algn="ctr">
-                      <a:solidFill>
-                        <a:srgbClr val="4A3038"/>
-                      </a:solidFill>
-                      <a:prstDash val="solid"/>
-                      <a:round/>
-                      <a:headEnd type="none" w="med" len="med"/>
-                      <a:tailEnd type="none" w="med" len="med"/>
-                    </a:lnT>
-                    <a:lnB w="9525" cap="flat" cmpd="sng" algn="ctr">
-                      <a:solidFill>
-                        <a:srgbClr val="4A3038"/>
-                      </a:solidFill>
-                      <a:prstDash val="solid"/>
-                      <a:round/>
-                      <a:headEnd type="none" w="med" len="med"/>
-                      <a:tailEnd type="none" w="med" len="med"/>
-                    </a:lnB>
-                    <a:solidFill>
-                      <a:srgbClr val="7B1E3A"/>
-                    </a:solidFill>
-                  </a:tcPr>
-                </a:tc>
-                <a:tc>
-                  <a:txBody>
-                    <a:bodyPr/>
-                    <a:lstStyle/>
-                    <a:p>
-                      <a:pPr algn="ctr" indent="0" marL="0">
-                        <a:buNone/>
-                      </a:pPr>
-                      <a:r>
-                        <a:rPr lang="en-US" sz="1100" b="1" dirty="0">
-                          <a:solidFill>
-                            <a:srgbClr val="F2EDE6"/>
-                          </a:solidFill>
-                          <a:latin typeface="Meiryo" pitchFamily="34" charset="0"/>
-                          <a:ea typeface="Meiryo" pitchFamily="34" charset="-122"/>
-                          <a:cs typeface="Meiryo" pitchFamily="34" charset="-120"/>
-                        </a:rPr>
-                        <a:t>累計マイル</a:t>
-                      </a:r>
-                      <a:endParaRPr lang="en-US" sz="1100" dirty="0">
-                        <a:latin typeface="Meiryo" charset="0"/>
-                        <a:ea typeface="Meiryo" charset="0"/>
-                        <a:cs typeface="Meiryo" charset="0"/>
-                      </a:endParaRPr>
-                    </a:p>
-                  </a:txBody>
-                  <a:tcPr marL="91440" marR="91440" marT="45720" marB="45720" anchor="ctr">
-                    <a:lnL w="9525" cap="flat" cmpd="sng" algn="ctr">
-                      <a:solidFill>
-                        <a:srgbClr val="4A3038"/>
-                      </a:solidFill>
-                      <a:prstDash val="solid"/>
-                      <a:round/>
-                      <a:headEnd type="none" w="med" len="med"/>
-                      <a:tailEnd type="none" w="med" len="med"/>
-                    </a:lnL>
-                    <a:lnR w="9525" cap="flat" cmpd="sng" algn="ctr">
-                      <a:solidFill>
-                        <a:srgbClr val="4A3038"/>
-                      </a:solidFill>
-                      <a:prstDash val="solid"/>
-                      <a:round/>
-                      <a:headEnd type="none" w="med" len="med"/>
-                      <a:tailEnd type="none" w="med" len="med"/>
-                    </a:lnR>
-                    <a:lnT w="9525" cap="flat" cmpd="sng" algn="ctr">
-                      <a:solidFill>
-                        <a:srgbClr val="4A3038"/>
-                      </a:solidFill>
-                      <a:prstDash val="solid"/>
-                      <a:round/>
-                      <a:headEnd type="none" w="med" len="med"/>
-                      <a:tailEnd type="none" w="med" len="med"/>
-                    </a:lnT>
-                    <a:lnB w="9525" cap="flat" cmpd="sng" algn="ctr">
-                      <a:solidFill>
-                        <a:srgbClr val="4A3038"/>
-                      </a:solidFill>
-                      <a:prstDash val="solid"/>
-                      <a:round/>
-                      <a:headEnd type="none" w="med" len="med"/>
-                      <a:tailEnd type="none" w="med" len="med"/>
-                    </a:lnB>
-                    <a:solidFill>
-                      <a:srgbClr val="7B1E3A"/>
-                    </a:solidFill>
-                  </a:tcPr>
-                </a:tc>
-                <a:tc>
-                  <a:txBody>
-                    <a:bodyPr/>
-                    <a:lstStyle/>
-                    <a:p>
-                      <a:pPr algn="ctr" indent="0" marL="0">
-                        <a:buNone/>
-                      </a:pPr>
-                      <a:r>
-                        <a:rPr lang="en-US" sz="1100" b="1" dirty="0">
-                          <a:solidFill>
-                            <a:srgbClr val="F2EDE6"/>
-                          </a:solidFill>
-                          <a:latin typeface="Meiryo" pitchFamily="34" charset="0"/>
-                          <a:ea typeface="Meiryo" pitchFamily="34" charset="-122"/>
-                          <a:cs typeface="Meiryo" pitchFamily="34" charset="-120"/>
-                        </a:rPr>
-                        <a:t>累計利益</a:t>
                       </a:r>
                       <a:endParaRPr lang="en-US" sz="1100" dirty="0">
                         <a:latin typeface="Meiryo" charset="0"/>
@@ -39686,7 +39707,75 @@
                           <a:ea typeface="Meiryo" pitchFamily="34" charset="-122"/>
                           <a:cs typeface="Meiryo" pitchFamily="34" charset="-120"/>
                         </a:rPr>
-                        <a:t>250</a:t>
+                        <a:t>+250</a:t>
+                      </a:r>
+                      <a:endParaRPr lang="en-US" sz="1100" dirty="0">
+                        <a:latin typeface="Meiryo" charset="0"/>
+                        <a:ea typeface="Meiryo" charset="0"/>
+                        <a:cs typeface="Meiryo" charset="0"/>
+                      </a:endParaRPr>
+                    </a:p>
+                  </a:txBody>
+                  <a:tcPr marL="91440" marR="91440" marT="45720" marB="45720" anchor="ctr">
+                    <a:lnL w="9525" cap="flat" cmpd="sng" algn="ctr">
+                      <a:solidFill>
+                        <a:srgbClr val="4A3038"/>
+                      </a:solidFill>
+                      <a:prstDash val="solid"/>
+                      <a:round/>
+                      <a:headEnd type="none" w="med" len="med"/>
+                      <a:tailEnd type="none" w="med" len="med"/>
+                    </a:lnL>
+                    <a:lnR w="9525" cap="flat" cmpd="sng" algn="ctr">
+                      <a:solidFill>
+                        <a:srgbClr val="4A3038"/>
+                      </a:solidFill>
+                      <a:prstDash val="solid"/>
+                      <a:round/>
+                      <a:headEnd type="none" w="med" len="med"/>
+                      <a:tailEnd type="none" w="med" len="med"/>
+                    </a:lnR>
+                    <a:lnT w="9525" cap="flat" cmpd="sng" algn="ctr">
+                      <a:solidFill>
+                        <a:srgbClr val="4A3038"/>
+                      </a:solidFill>
+                      <a:prstDash val="solid"/>
+                      <a:round/>
+                      <a:headEnd type="none" w="med" len="med"/>
+                      <a:tailEnd type="none" w="med" len="med"/>
+                    </a:lnT>
+                    <a:lnB w="9525" cap="flat" cmpd="sng" algn="ctr">
+                      <a:solidFill>
+                        <a:srgbClr val="4A3038"/>
+                      </a:solidFill>
+                      <a:prstDash val="solid"/>
+                      <a:round/>
+                      <a:headEnd type="none" w="med" len="med"/>
+                      <a:tailEnd type="none" w="med" len="med"/>
+                    </a:lnB>
+                    <a:solidFill>
+                      <a:srgbClr val="17111A"/>
+                    </a:solidFill>
+                  </a:tcPr>
+                </a:tc>
+                <a:tc>
+                  <a:txBody>
+                    <a:bodyPr/>
+                    <a:lstStyle/>
+                    <a:p>
+                      <a:pPr algn="ctr" indent="0" marL="0">
+                        <a:buNone/>
+                      </a:pPr>
+                      <a:r>
+                        <a:rPr lang="en-US" sz="1100" dirty="0">
+                          <a:solidFill>
+                            <a:srgbClr val="E0A458"/>
+                          </a:solidFill>
+                          <a:latin typeface="Meiryo" pitchFamily="34" charset="0"/>
+                          <a:ea typeface="Meiryo" pitchFamily="34" charset="-122"/>
+                          <a:cs typeface="Meiryo" pitchFamily="34" charset="-120"/>
+                        </a:rPr>
+                        <a:t>▲150</a:t>
                       </a:r>
                       <a:endParaRPr lang="en-US" sz="1100" dirty="0">
                         <a:latin typeface="Meiryo" charset="0"/>
@@ -39814,15 +39903,15 @@
                         <a:buNone/>
                       </a:pPr>
                       <a:r>
-                        <a:rPr lang="en-US" sz="1100" b="1" dirty="0">
+                        <a:rPr lang="en-US" sz="1100" dirty="0">
                           <a:solidFill>
-                            <a:srgbClr val="7FD1AE"/>
+                            <a:srgbClr val="C9A227"/>
                           </a:solidFill>
                           <a:latin typeface="Meiryo" pitchFamily="34" charset="0"/>
                           <a:ea typeface="Meiryo" pitchFamily="34" charset="-122"/>
                           <a:cs typeface="Meiryo" pitchFamily="34" charset="-120"/>
                         </a:rPr>
-                        <a:t>+3,086</a:t>
+                        <a:t>+150</a:t>
                       </a:r>
                       <a:endParaRPr lang="en-US" sz="1100" dirty="0">
                         <a:latin typeface="Meiryo" charset="0"/>
@@ -39882,83 +39971,15 @@
                         <a:buNone/>
                       </a:pPr>
                       <a:r>
-                        <a:rPr lang="en-US" sz="1100" dirty="0">
+                        <a:rPr lang="en-US" sz="1100" b="1" dirty="0">
                           <a:solidFill>
-                            <a:srgbClr val="F2EDE6"/>
+                            <a:srgbClr val="7FD1AE"/>
                           </a:solidFill>
                           <a:latin typeface="Meiryo" pitchFamily="34" charset="0"/>
                           <a:ea typeface="Meiryo" pitchFamily="34" charset="-122"/>
                           <a:cs typeface="Meiryo" pitchFamily="34" charset="-120"/>
                         </a:rPr>
-                        <a:t>164</a:t>
-                      </a:r>
-                      <a:endParaRPr lang="en-US" sz="1100" dirty="0">
-                        <a:latin typeface="Meiryo" charset="0"/>
-                        <a:ea typeface="Meiryo" charset="0"/>
-                        <a:cs typeface="Meiryo" charset="0"/>
-                      </a:endParaRPr>
-                    </a:p>
-                  </a:txBody>
-                  <a:tcPr marL="91440" marR="91440" marT="45720" marB="45720" anchor="ctr">
-                    <a:lnL w="9525" cap="flat" cmpd="sng" algn="ctr">
-                      <a:solidFill>
-                        <a:srgbClr val="4A3038"/>
-                      </a:solidFill>
-                      <a:prstDash val="solid"/>
-                      <a:round/>
-                      <a:headEnd type="none" w="med" len="med"/>
-                      <a:tailEnd type="none" w="med" len="med"/>
-                    </a:lnL>
-                    <a:lnR w="9525" cap="flat" cmpd="sng" algn="ctr">
-                      <a:solidFill>
-                        <a:srgbClr val="4A3038"/>
-                      </a:solidFill>
-                      <a:prstDash val="solid"/>
-                      <a:round/>
-                      <a:headEnd type="none" w="med" len="med"/>
-                      <a:tailEnd type="none" w="med" len="med"/>
-                    </a:lnR>
-                    <a:lnT w="9525" cap="flat" cmpd="sng" algn="ctr">
-                      <a:solidFill>
-                        <a:srgbClr val="4A3038"/>
-                      </a:solidFill>
-                      <a:prstDash val="solid"/>
-                      <a:round/>
-                      <a:headEnd type="none" w="med" len="med"/>
-                      <a:tailEnd type="none" w="med" len="med"/>
-                    </a:lnT>
-                    <a:lnB w="9525" cap="flat" cmpd="sng" algn="ctr">
-                      <a:solidFill>
-                        <a:srgbClr val="4A3038"/>
-                      </a:solidFill>
-                      <a:prstDash val="solid"/>
-                      <a:round/>
-                      <a:headEnd type="none" w="med" len="med"/>
-                      <a:tailEnd type="none" w="med" len="med"/>
-                    </a:lnB>
-                    <a:solidFill>
-                      <a:srgbClr val="17111A"/>
-                    </a:solidFill>
-                  </a:tcPr>
-                </a:tc>
-                <a:tc>
-                  <a:txBody>
-                    <a:bodyPr/>
-                    <a:lstStyle/>
-                    <a:p>
-                      <a:pPr algn="ctr" indent="0" marL="0">
-                        <a:buNone/>
-                      </a:pPr>
-                      <a:r>
-                        <a:rPr lang="en-US" sz="1100" dirty="0">
-                          <a:solidFill>
-                            <a:srgbClr val="C9A227"/>
-                          </a:solidFill>
-                          <a:latin typeface="Meiryo" pitchFamily="34" charset="0"/>
-                          <a:ea typeface="Meiryo" pitchFamily="34" charset="-122"/>
-                          <a:cs typeface="Meiryo" pitchFamily="34" charset="-120"/>
-                        </a:rPr>
-                        <a:t>3,086</a:t>
+                        <a:t>+3,086</a:t>
                       </a:r>
                       <a:endParaRPr lang="en-US" sz="1100" dirty="0">
                         <a:latin typeface="Meiryo" charset="0"/>
@@ -40232,7 +40253,75 @@
                           <a:ea typeface="Meiryo" pitchFamily="34" charset="-122"/>
                           <a:cs typeface="Meiryo" pitchFamily="34" charset="-120"/>
                         </a:rPr>
-                        <a:t>750</a:t>
+                        <a:t>+750</a:t>
+                      </a:r>
+                      <a:endParaRPr lang="en-US" sz="1100" dirty="0">
+                        <a:latin typeface="Meiryo" charset="0"/>
+                        <a:ea typeface="Meiryo" charset="0"/>
+                        <a:cs typeface="Meiryo" charset="0"/>
+                      </a:endParaRPr>
+                    </a:p>
+                  </a:txBody>
+                  <a:tcPr marL="91440" marR="91440" marT="45720" marB="45720" anchor="ctr">
+                    <a:lnL w="9525" cap="flat" cmpd="sng" algn="ctr">
+                      <a:solidFill>
+                        <a:srgbClr val="4A3038"/>
+                      </a:solidFill>
+                      <a:prstDash val="solid"/>
+                      <a:round/>
+                      <a:headEnd type="none" w="med" len="med"/>
+                      <a:tailEnd type="none" w="med" len="med"/>
+                    </a:lnL>
+                    <a:lnR w="9525" cap="flat" cmpd="sng" algn="ctr">
+                      <a:solidFill>
+                        <a:srgbClr val="4A3038"/>
+                      </a:solidFill>
+                      <a:prstDash val="solid"/>
+                      <a:round/>
+                      <a:headEnd type="none" w="med" len="med"/>
+                      <a:tailEnd type="none" w="med" len="med"/>
+                    </a:lnR>
+                    <a:lnT w="9525" cap="flat" cmpd="sng" algn="ctr">
+                      <a:solidFill>
+                        <a:srgbClr val="4A3038"/>
+                      </a:solidFill>
+                      <a:prstDash val="solid"/>
+                      <a:round/>
+                      <a:headEnd type="none" w="med" len="med"/>
+                      <a:tailEnd type="none" w="med" len="med"/>
+                    </a:lnT>
+                    <a:lnB w="9525" cap="flat" cmpd="sng" algn="ctr">
+                      <a:solidFill>
+                        <a:srgbClr val="4A3038"/>
+                      </a:solidFill>
+                      <a:prstDash val="solid"/>
+                      <a:round/>
+                      <a:headEnd type="none" w="med" len="med"/>
+                      <a:tailEnd type="none" w="med" len="med"/>
+                    </a:lnB>
+                    <a:solidFill>
+                      <a:srgbClr val="17111A"/>
+                    </a:solidFill>
+                  </a:tcPr>
+                </a:tc>
+                <a:tc>
+                  <a:txBody>
+                    <a:bodyPr/>
+                    <a:lstStyle/>
+                    <a:p>
+                      <a:pPr algn="ctr" indent="0" marL="0">
+                        <a:buNone/>
+                      </a:pPr>
+                      <a:r>
+                        <a:rPr lang="en-US" sz="1100" dirty="0">
+                          <a:solidFill>
+                            <a:srgbClr val="E0A458"/>
+                          </a:solidFill>
+                          <a:latin typeface="Meiryo" pitchFamily="34" charset="0"/>
+                          <a:ea typeface="Meiryo" pitchFamily="34" charset="-122"/>
+                          <a:cs typeface="Meiryo" pitchFamily="34" charset="-120"/>
+                        </a:rPr>
+                        <a:t>▲450</a:t>
                       </a:r>
                       <a:endParaRPr lang="en-US" sz="1100" dirty="0">
                         <a:latin typeface="Meiryo" charset="0"/>
@@ -40360,15 +40449,15 @@
                         <a:buNone/>
                       </a:pPr>
                       <a:r>
-                        <a:rPr lang="en-US" sz="1100" b="1" dirty="0">
+                        <a:rPr lang="en-US" sz="1100" dirty="0">
                           <a:solidFill>
-                            <a:srgbClr val="7FD1AE"/>
+                            <a:srgbClr val="C9A227"/>
                           </a:solidFill>
                           <a:latin typeface="Meiryo" pitchFamily="34" charset="0"/>
                           <a:ea typeface="Meiryo" pitchFamily="34" charset="-122"/>
                           <a:cs typeface="Meiryo" pitchFamily="34" charset="-120"/>
                         </a:rPr>
-                        <a:t>+3,259</a:t>
+                        <a:t>+450</a:t>
                       </a:r>
                       <a:endParaRPr lang="en-US" sz="1100" dirty="0">
                         <a:latin typeface="Meiryo" charset="0"/>
@@ -40428,83 +40517,15 @@
                         <a:buNone/>
                       </a:pPr>
                       <a:r>
-                        <a:rPr lang="en-US" sz="1100" dirty="0">
+                        <a:rPr lang="en-US" sz="1100" b="1" dirty="0">
                           <a:solidFill>
-                            <a:srgbClr val="F2EDE6"/>
+                            <a:srgbClr val="7FD1AE"/>
                           </a:solidFill>
                           <a:latin typeface="Meiryo" pitchFamily="34" charset="0"/>
                           <a:ea typeface="Meiryo" pitchFamily="34" charset="-122"/>
                           <a:cs typeface="Meiryo" pitchFamily="34" charset="-120"/>
                         </a:rPr>
-                        <a:t>983</a:t>
-                      </a:r>
-                      <a:endParaRPr lang="en-US" sz="1100" dirty="0">
-                        <a:latin typeface="Meiryo" charset="0"/>
-                        <a:ea typeface="Meiryo" charset="0"/>
-                        <a:cs typeface="Meiryo" charset="0"/>
-                      </a:endParaRPr>
-                    </a:p>
-                  </a:txBody>
-                  <a:tcPr marL="91440" marR="91440" marT="45720" marB="45720" anchor="ctr">
-                    <a:lnL w="9525" cap="flat" cmpd="sng" algn="ctr">
-                      <a:solidFill>
-                        <a:srgbClr val="4A3038"/>
-                      </a:solidFill>
-                      <a:prstDash val="solid"/>
-                      <a:round/>
-                      <a:headEnd type="none" w="med" len="med"/>
-                      <a:tailEnd type="none" w="med" len="med"/>
-                    </a:lnL>
-                    <a:lnR w="9525" cap="flat" cmpd="sng" algn="ctr">
-                      <a:solidFill>
-                        <a:srgbClr val="4A3038"/>
-                      </a:solidFill>
-                      <a:prstDash val="solid"/>
-                      <a:round/>
-                      <a:headEnd type="none" w="med" len="med"/>
-                      <a:tailEnd type="none" w="med" len="med"/>
-                    </a:lnR>
-                    <a:lnT w="9525" cap="flat" cmpd="sng" algn="ctr">
-                      <a:solidFill>
-                        <a:srgbClr val="4A3038"/>
-                      </a:solidFill>
-                      <a:prstDash val="solid"/>
-                      <a:round/>
-                      <a:headEnd type="none" w="med" len="med"/>
-                      <a:tailEnd type="none" w="med" len="med"/>
-                    </a:lnT>
-                    <a:lnB w="9525" cap="flat" cmpd="sng" algn="ctr">
-                      <a:solidFill>
-                        <a:srgbClr val="4A3038"/>
-                      </a:solidFill>
-                      <a:prstDash val="solid"/>
-                      <a:round/>
-                      <a:headEnd type="none" w="med" len="med"/>
-                      <a:tailEnd type="none" w="med" len="med"/>
-                    </a:lnB>
-                    <a:solidFill>
-                      <a:srgbClr val="17111A"/>
-                    </a:solidFill>
-                  </a:tcPr>
-                </a:tc>
-                <a:tc>
-                  <a:txBody>
-                    <a:bodyPr/>
-                    <a:lstStyle/>
-                    <a:p>
-                      <a:pPr algn="ctr" indent="0" marL="0">
-                        <a:buNone/>
-                      </a:pPr>
-                      <a:r>
-                        <a:rPr lang="en-US" sz="1100" dirty="0">
-                          <a:solidFill>
-                            <a:srgbClr val="C9A227"/>
-                          </a:solidFill>
-                          <a:latin typeface="Meiryo" pitchFamily="34" charset="0"/>
-                          <a:ea typeface="Meiryo" pitchFamily="34" charset="-122"/>
-                          <a:cs typeface="Meiryo" pitchFamily="34" charset="-120"/>
-                        </a:rPr>
-                        <a:t>9,517</a:t>
+                        <a:t>+3,259</a:t>
                       </a:r>
                       <a:endParaRPr lang="en-US" sz="1100" dirty="0">
                         <a:latin typeface="Meiryo" charset="0"/>
@@ -40778,7 +40799,75 @@
                           <a:ea typeface="Meiryo" pitchFamily="34" charset="-122"/>
                           <a:cs typeface="Meiryo" pitchFamily="34" charset="-120"/>
                         </a:rPr>
-                        <a:t>1,250</a:t>
+                        <a:t>+1,250</a:t>
+                      </a:r>
+                      <a:endParaRPr lang="en-US" sz="1100" dirty="0">
+                        <a:latin typeface="Meiryo" charset="0"/>
+                        <a:ea typeface="Meiryo" charset="0"/>
+                        <a:cs typeface="Meiryo" charset="0"/>
+                      </a:endParaRPr>
+                    </a:p>
+                  </a:txBody>
+                  <a:tcPr marL="91440" marR="91440" marT="45720" marB="45720" anchor="ctr">
+                    <a:lnL w="9525" cap="flat" cmpd="sng" algn="ctr">
+                      <a:solidFill>
+                        <a:srgbClr val="4A3038"/>
+                      </a:solidFill>
+                      <a:prstDash val="solid"/>
+                      <a:round/>
+                      <a:headEnd type="none" w="med" len="med"/>
+                      <a:tailEnd type="none" w="med" len="med"/>
+                    </a:lnL>
+                    <a:lnR w="9525" cap="flat" cmpd="sng" algn="ctr">
+                      <a:solidFill>
+                        <a:srgbClr val="4A3038"/>
+                      </a:solidFill>
+                      <a:prstDash val="solid"/>
+                      <a:round/>
+                      <a:headEnd type="none" w="med" len="med"/>
+                      <a:tailEnd type="none" w="med" len="med"/>
+                    </a:lnR>
+                    <a:lnT w="9525" cap="flat" cmpd="sng" algn="ctr">
+                      <a:solidFill>
+                        <a:srgbClr val="4A3038"/>
+                      </a:solidFill>
+                      <a:prstDash val="solid"/>
+                      <a:round/>
+                      <a:headEnd type="none" w="med" len="med"/>
+                      <a:tailEnd type="none" w="med" len="med"/>
+                    </a:lnT>
+                    <a:lnB w="9525" cap="flat" cmpd="sng" algn="ctr">
+                      <a:solidFill>
+                        <a:srgbClr val="4A3038"/>
+                      </a:solidFill>
+                      <a:prstDash val="solid"/>
+                      <a:round/>
+                      <a:headEnd type="none" w="med" len="med"/>
+                      <a:tailEnd type="none" w="med" len="med"/>
+                    </a:lnB>
+                    <a:solidFill>
+                      <a:srgbClr val="17111A"/>
+                    </a:solidFill>
+                  </a:tcPr>
+                </a:tc>
+                <a:tc>
+                  <a:txBody>
+                    <a:bodyPr/>
+                    <a:lstStyle/>
+                    <a:p>
+                      <a:pPr algn="ctr" indent="0" marL="0">
+                        <a:buNone/>
+                      </a:pPr>
+                      <a:r>
+                        <a:rPr lang="en-US" sz="1100" dirty="0">
+                          <a:solidFill>
+                            <a:srgbClr val="E0A458"/>
+                          </a:solidFill>
+                          <a:latin typeface="Meiryo" pitchFamily="34" charset="0"/>
+                          <a:ea typeface="Meiryo" pitchFamily="34" charset="-122"/>
+                          <a:cs typeface="Meiryo" pitchFamily="34" charset="-120"/>
+                        </a:rPr>
+                        <a:t>▲750</a:t>
                       </a:r>
                       <a:endParaRPr lang="en-US" sz="1100" dirty="0">
                         <a:latin typeface="Meiryo" charset="0"/>
@@ -40906,15 +40995,15 @@
                         <a:buNone/>
                       </a:pPr>
                       <a:r>
-                        <a:rPr lang="en-US" sz="1100" b="1" dirty="0">
+                        <a:rPr lang="en-US" sz="1100" dirty="0">
                           <a:solidFill>
-                            <a:srgbClr val="7FD1AE"/>
+                            <a:srgbClr val="C9A227"/>
                           </a:solidFill>
                           <a:latin typeface="Meiryo" pitchFamily="34" charset="0"/>
                           <a:ea typeface="Meiryo" pitchFamily="34" charset="-122"/>
                           <a:cs typeface="Meiryo" pitchFamily="34" charset="-120"/>
                         </a:rPr>
-                        <a:t>+3,431</a:t>
+                        <a:t>+750</a:t>
                       </a:r>
                       <a:endParaRPr lang="en-US" sz="1100" dirty="0">
                         <a:latin typeface="Meiryo" charset="0"/>
@@ -40974,83 +41063,15 @@
                         <a:buNone/>
                       </a:pPr>
                       <a:r>
-                        <a:rPr lang="en-US" sz="1100" dirty="0">
+                        <a:rPr lang="en-US" sz="1100" b="1" dirty="0">
                           <a:solidFill>
-                            <a:srgbClr val="F2EDE6"/>
+                            <a:srgbClr val="7FD1AE"/>
                           </a:solidFill>
                           <a:latin typeface="Meiryo" pitchFamily="34" charset="0"/>
                           <a:ea typeface="Meiryo" pitchFamily="34" charset="-122"/>
                           <a:cs typeface="Meiryo" pitchFamily="34" charset="-120"/>
                         </a:rPr>
-                        <a:t>2,456</a:t>
-                      </a:r>
-                      <a:endParaRPr lang="en-US" sz="1100" dirty="0">
-                        <a:latin typeface="Meiryo" charset="0"/>
-                        <a:ea typeface="Meiryo" charset="0"/>
-                        <a:cs typeface="Meiryo" charset="0"/>
-                      </a:endParaRPr>
-                    </a:p>
-                  </a:txBody>
-                  <a:tcPr marL="91440" marR="91440" marT="45720" marB="45720" anchor="ctr">
-                    <a:lnL w="9525" cap="flat" cmpd="sng" algn="ctr">
-                      <a:solidFill>
-                        <a:srgbClr val="4A3038"/>
-                      </a:solidFill>
-                      <a:prstDash val="solid"/>
-                      <a:round/>
-                      <a:headEnd type="none" w="med" len="med"/>
-                      <a:tailEnd type="none" w="med" len="med"/>
-                    </a:lnL>
-                    <a:lnR w="9525" cap="flat" cmpd="sng" algn="ctr">
-                      <a:solidFill>
-                        <a:srgbClr val="4A3038"/>
-                      </a:solidFill>
-                      <a:prstDash val="solid"/>
-                      <a:round/>
-                      <a:headEnd type="none" w="med" len="med"/>
-                      <a:tailEnd type="none" w="med" len="med"/>
-                    </a:lnR>
-                    <a:lnT w="9525" cap="flat" cmpd="sng" algn="ctr">
-                      <a:solidFill>
-                        <a:srgbClr val="4A3038"/>
-                      </a:solidFill>
-                      <a:prstDash val="solid"/>
-                      <a:round/>
-                      <a:headEnd type="none" w="med" len="med"/>
-                      <a:tailEnd type="none" w="med" len="med"/>
-                    </a:lnT>
-                    <a:lnB w="9525" cap="flat" cmpd="sng" algn="ctr">
-                      <a:solidFill>
-                        <a:srgbClr val="4A3038"/>
-                      </a:solidFill>
-                      <a:prstDash val="solid"/>
-                      <a:round/>
-                      <a:headEnd type="none" w="med" len="med"/>
-                      <a:tailEnd type="none" w="med" len="med"/>
-                    </a:lnB>
-                    <a:solidFill>
-                      <a:srgbClr val="17111A"/>
-                    </a:solidFill>
-                  </a:tcPr>
-                </a:tc>
-                <a:tc>
-                  <a:txBody>
-                    <a:bodyPr/>
-                    <a:lstStyle/>
-                    <a:p>
-                      <a:pPr algn="ctr" indent="0" marL="0">
-                        <a:buNone/>
-                      </a:pPr>
-                      <a:r>
-                        <a:rPr lang="en-US" sz="1100" dirty="0">
-                          <a:solidFill>
-                            <a:srgbClr val="C9A227"/>
-                          </a:solidFill>
-                          <a:latin typeface="Meiryo" pitchFamily="34" charset="0"/>
-                          <a:ea typeface="Meiryo" pitchFamily="34" charset="-122"/>
-                          <a:cs typeface="Meiryo" pitchFamily="34" charset="-120"/>
-                        </a:rPr>
-                        <a:t>16,294</a:t>
+                        <a:t>+3,431</a:t>
                       </a:r>
                       <a:endParaRPr lang="en-US" sz="1100" dirty="0">
                         <a:latin typeface="Meiryo" charset="0"/>
@@ -41324,7 +41345,75 @@
                           <a:ea typeface="Meiryo" pitchFamily="34" charset="-122"/>
                           <a:cs typeface="Meiryo" pitchFamily="34" charset="-120"/>
                         </a:rPr>
-                        <a:t>2,500</a:t>
+                        <a:t>+2,500</a:t>
+                      </a:r>
+                      <a:endParaRPr lang="en-US" sz="1100" dirty="0">
+                        <a:latin typeface="Meiryo" charset="0"/>
+                        <a:ea typeface="Meiryo" charset="0"/>
+                        <a:cs typeface="Meiryo" charset="0"/>
+                      </a:endParaRPr>
+                    </a:p>
+                  </a:txBody>
+                  <a:tcPr marL="91440" marR="91440" marT="45720" marB="45720" anchor="ctr">
+                    <a:lnL w="9525" cap="flat" cmpd="sng" algn="ctr">
+                      <a:solidFill>
+                        <a:srgbClr val="4A3038"/>
+                      </a:solidFill>
+                      <a:prstDash val="solid"/>
+                      <a:round/>
+                      <a:headEnd type="none" w="med" len="med"/>
+                      <a:tailEnd type="none" w="med" len="med"/>
+                    </a:lnL>
+                    <a:lnR w="9525" cap="flat" cmpd="sng" algn="ctr">
+                      <a:solidFill>
+                        <a:srgbClr val="4A3038"/>
+                      </a:solidFill>
+                      <a:prstDash val="solid"/>
+                      <a:round/>
+                      <a:headEnd type="none" w="med" len="med"/>
+                      <a:tailEnd type="none" w="med" len="med"/>
+                    </a:lnR>
+                    <a:lnT w="9525" cap="flat" cmpd="sng" algn="ctr">
+                      <a:solidFill>
+                        <a:srgbClr val="4A3038"/>
+                      </a:solidFill>
+                      <a:prstDash val="solid"/>
+                      <a:round/>
+                      <a:headEnd type="none" w="med" len="med"/>
+                      <a:tailEnd type="none" w="med" len="med"/>
+                    </a:lnT>
+                    <a:lnB w="9525" cap="flat" cmpd="sng" algn="ctr">
+                      <a:solidFill>
+                        <a:srgbClr val="4A3038"/>
+                      </a:solidFill>
+                      <a:prstDash val="solid"/>
+                      <a:round/>
+                      <a:headEnd type="none" w="med" len="med"/>
+                      <a:tailEnd type="none" w="med" len="med"/>
+                    </a:lnB>
+                    <a:solidFill>
+                      <a:srgbClr val="7B1E3A"/>
+                    </a:solidFill>
+                  </a:tcPr>
+                </a:tc>
+                <a:tc>
+                  <a:txBody>
+                    <a:bodyPr/>
+                    <a:lstStyle/>
+                    <a:p>
+                      <a:pPr algn="ctr" indent="0" marL="0">
+                        <a:buNone/>
+                      </a:pPr>
+                      <a:r>
+                        <a:rPr lang="en-US" sz="1100" dirty="0">
+                          <a:solidFill>
+                            <a:srgbClr val="E0A458"/>
+                          </a:solidFill>
+                          <a:latin typeface="Meiryo" pitchFamily="34" charset="0"/>
+                          <a:ea typeface="Meiryo" pitchFamily="34" charset="-122"/>
+                          <a:cs typeface="Meiryo" pitchFamily="34" charset="-120"/>
+                        </a:rPr>
+                        <a:t>▲1,500</a:t>
                       </a:r>
                       <a:endParaRPr lang="en-US" sz="1100" dirty="0">
                         <a:latin typeface="Meiryo" charset="0"/>
@@ -41452,6 +41541,74 @@
                         <a:buNone/>
                       </a:pPr>
                       <a:r>
+                        <a:rPr lang="en-US" sz="1100" dirty="0">
+                          <a:solidFill>
+                            <a:srgbClr val="E8CE78"/>
+                          </a:solidFill>
+                          <a:latin typeface="Meiryo" pitchFamily="34" charset="0"/>
+                          <a:ea typeface="Meiryo" pitchFamily="34" charset="-122"/>
+                          <a:cs typeface="Meiryo" pitchFamily="34" charset="-120"/>
+                        </a:rPr>
+                        <a:t>+1,500</a:t>
+                      </a:r>
+                      <a:endParaRPr lang="en-US" sz="1100" dirty="0">
+                        <a:latin typeface="Meiryo" charset="0"/>
+                        <a:ea typeface="Meiryo" charset="0"/>
+                        <a:cs typeface="Meiryo" charset="0"/>
+                      </a:endParaRPr>
+                    </a:p>
+                  </a:txBody>
+                  <a:tcPr marL="91440" marR="91440" marT="45720" marB="45720" anchor="ctr">
+                    <a:lnL w="9525" cap="flat" cmpd="sng" algn="ctr">
+                      <a:solidFill>
+                        <a:srgbClr val="4A3038"/>
+                      </a:solidFill>
+                      <a:prstDash val="solid"/>
+                      <a:round/>
+                      <a:headEnd type="none" w="med" len="med"/>
+                      <a:tailEnd type="none" w="med" len="med"/>
+                    </a:lnL>
+                    <a:lnR w="9525" cap="flat" cmpd="sng" algn="ctr">
+                      <a:solidFill>
+                        <a:srgbClr val="4A3038"/>
+                      </a:solidFill>
+                      <a:prstDash val="solid"/>
+                      <a:round/>
+                      <a:headEnd type="none" w="med" len="med"/>
+                      <a:tailEnd type="none" w="med" len="med"/>
+                    </a:lnR>
+                    <a:lnT w="9525" cap="flat" cmpd="sng" algn="ctr">
+                      <a:solidFill>
+                        <a:srgbClr val="4A3038"/>
+                      </a:solidFill>
+                      <a:prstDash val="solid"/>
+                      <a:round/>
+                      <a:headEnd type="none" w="med" len="med"/>
+                      <a:tailEnd type="none" w="med" len="med"/>
+                    </a:lnT>
+                    <a:lnB w="9525" cap="flat" cmpd="sng" algn="ctr">
+                      <a:solidFill>
+                        <a:srgbClr val="4A3038"/>
+                      </a:solidFill>
+                      <a:prstDash val="solid"/>
+                      <a:round/>
+                      <a:headEnd type="none" w="med" len="med"/>
+                      <a:tailEnd type="none" w="med" len="med"/>
+                    </a:lnB>
+                    <a:solidFill>
+                      <a:srgbClr val="7B1E3A"/>
+                    </a:solidFill>
+                  </a:tcPr>
+                </a:tc>
+                <a:tc>
+                  <a:txBody>
+                    <a:bodyPr/>
+                    <a:lstStyle/>
+                    <a:p>
+                      <a:pPr algn="ctr" indent="0" marL="0">
+                        <a:buNone/>
+                      </a:pPr>
+                      <a:r>
                         <a:rPr lang="en-US" sz="1100" b="1" dirty="0">
                           <a:solidFill>
                             <a:srgbClr val="7FD1AE"/>
@@ -41511,142 +41668,6 @@
                     </a:solidFill>
                   </a:tcPr>
                 </a:tc>
-                <a:tc>
-                  <a:txBody>
-                    <a:bodyPr/>
-                    <a:lstStyle/>
-                    <a:p>
-                      <a:pPr algn="ctr" indent="0" marL="0">
-                        <a:buNone/>
-                      </a:pPr>
-                      <a:r>
-                        <a:rPr lang="en-US" sz="1100" dirty="0">
-                          <a:solidFill>
-                            <a:srgbClr val="F2EDE6"/>
-                          </a:solidFill>
-                          <a:latin typeface="Meiryo" pitchFamily="34" charset="0"/>
-                          <a:ea typeface="Meiryo" pitchFamily="34" charset="-122"/>
-                          <a:cs typeface="Meiryo" pitchFamily="34" charset="-120"/>
-                        </a:rPr>
-                        <a:t>9,007</a:t>
-                      </a:r>
-                      <a:endParaRPr lang="en-US" sz="1100" dirty="0">
-                        <a:latin typeface="Meiryo" charset="0"/>
-                        <a:ea typeface="Meiryo" charset="0"/>
-                        <a:cs typeface="Meiryo" charset="0"/>
-                      </a:endParaRPr>
-                    </a:p>
-                  </a:txBody>
-                  <a:tcPr marL="91440" marR="91440" marT="45720" marB="45720" anchor="ctr">
-                    <a:lnL w="9525" cap="flat" cmpd="sng" algn="ctr">
-                      <a:solidFill>
-                        <a:srgbClr val="4A3038"/>
-                      </a:solidFill>
-                      <a:prstDash val="solid"/>
-                      <a:round/>
-                      <a:headEnd type="none" w="med" len="med"/>
-                      <a:tailEnd type="none" w="med" len="med"/>
-                    </a:lnL>
-                    <a:lnR w="9525" cap="flat" cmpd="sng" algn="ctr">
-                      <a:solidFill>
-                        <a:srgbClr val="4A3038"/>
-                      </a:solidFill>
-                      <a:prstDash val="solid"/>
-                      <a:round/>
-                      <a:headEnd type="none" w="med" len="med"/>
-                      <a:tailEnd type="none" w="med" len="med"/>
-                    </a:lnR>
-                    <a:lnT w="9525" cap="flat" cmpd="sng" algn="ctr">
-                      <a:solidFill>
-                        <a:srgbClr val="4A3038"/>
-                      </a:solidFill>
-                      <a:prstDash val="solid"/>
-                      <a:round/>
-                      <a:headEnd type="none" w="med" len="med"/>
-                      <a:tailEnd type="none" w="med" len="med"/>
-                    </a:lnT>
-                    <a:lnB w="9525" cap="flat" cmpd="sng" algn="ctr">
-                      <a:solidFill>
-                        <a:srgbClr val="4A3038"/>
-                      </a:solidFill>
-                      <a:prstDash val="solid"/>
-                      <a:round/>
-                      <a:headEnd type="none" w="med" len="med"/>
-                      <a:tailEnd type="none" w="med" len="med"/>
-                    </a:lnB>
-                    <a:solidFill>
-                      <a:srgbClr val="7B1E3A"/>
-                    </a:solidFill>
-                  </a:tcPr>
-                </a:tc>
-                <a:tc>
-                  <a:txBody>
-                    <a:bodyPr/>
-                    <a:lstStyle/>
-                    <a:p>
-                      <a:pPr algn="ctr" indent="0" marL="0">
-                        <a:buNone/>
-                      </a:pPr>
-                      <a:r>
-                        <a:rPr lang="en-US" sz="1100" b="1" dirty="0">
-                          <a:solidFill>
-                            <a:srgbClr val="E8CE78"/>
-                          </a:solidFill>
-                          <a:latin typeface="Meiryo" pitchFamily="34" charset="0"/>
-                          <a:ea typeface="Meiryo" pitchFamily="34" charset="-122"/>
-                          <a:cs typeface="Meiryo" pitchFamily="34" charset="-120"/>
-                        </a:rPr>
-                        <a:t>34,743</a:t>
-                      </a:r>
-                      <a:endParaRPr lang="en-US" sz="1100" dirty="0">
-                        <a:latin typeface="Meiryo" charset="0"/>
-                        <a:ea typeface="Meiryo" charset="0"/>
-                        <a:cs typeface="Meiryo" charset="0"/>
-                      </a:endParaRPr>
-                    </a:p>
-                  </a:txBody>
-                  <a:tcPr marL="91440" marR="91440" marT="45720" marB="45720" anchor="ctr">
-                    <a:lnL w="9525" cap="flat" cmpd="sng" algn="ctr">
-                      <a:solidFill>
-                        <a:srgbClr val="4A3038"/>
-                      </a:solidFill>
-                      <a:prstDash val="solid"/>
-                      <a:round/>
-                      <a:headEnd type="none" w="med" len="med"/>
-                      <a:tailEnd type="none" w="med" len="med"/>
-                    </a:lnL>
-                    <a:lnR w="9525" cap="flat" cmpd="sng" algn="ctr">
-                      <a:solidFill>
-                        <a:srgbClr val="4A3038"/>
-                      </a:solidFill>
-                      <a:prstDash val="solid"/>
-                      <a:round/>
-                      <a:headEnd type="none" w="med" len="med"/>
-                      <a:tailEnd type="none" w="med" len="med"/>
-                    </a:lnR>
-                    <a:lnT w="9525" cap="flat" cmpd="sng" algn="ctr">
-                      <a:solidFill>
-                        <a:srgbClr val="4A3038"/>
-                      </a:solidFill>
-                      <a:prstDash val="solid"/>
-                      <a:round/>
-                      <a:headEnd type="none" w="med" len="med"/>
-                      <a:tailEnd type="none" w="med" len="med"/>
-                    </a:lnT>
-                    <a:lnB w="9525" cap="flat" cmpd="sng" algn="ctr">
-                      <a:solidFill>
-                        <a:srgbClr val="4A3038"/>
-                      </a:solidFill>
-                      <a:prstDash val="solid"/>
-                      <a:round/>
-                      <a:headEnd type="none" w="med" len="med"/>
-                      <a:tailEnd type="none" w="med" len="med"/>
-                    </a:lnB>
-                    <a:solidFill>
-                      <a:srgbClr val="7B1E3A"/>
-                    </a:solidFill>
-                  </a:tcPr>
-                </a:tc>
               </a:tr>
             </a:tbl>
           </a:graphicData>
@@ -41660,12 +41681,12 @@
         </p:nvSpPr>
         <p:spPr>
           <a:xfrm>
-            <a:off x="566928" y="4114800"/>
-            <a:ext cx="5394960" cy="1133856"/>
+            <a:off x="566928" y="4133088"/>
+            <a:ext cx="5394960" cy="1115568"/>
           </a:xfrm>
           <a:prstGeom prst="roundRect">
             <a:avLst>
-              <a:gd name="adj" fmla="val 4839"/>
+              <a:gd name="adj" fmla="val 4918"/>
             </a:avLst>
           </a:prstGeom>
           <a:solidFill>
@@ -41694,7 +41715,7 @@
         </p:nvSpPr>
         <p:spPr>
           <a:xfrm>
-            <a:off x="932688" y="4242816"/>
+            <a:off x="932688" y="4261104"/>
             <a:ext cx="4663440" cy="292608"/>
           </a:xfrm>
           <a:prstGeom prst="rect">
@@ -41719,7 +41740,7 @@
                 <a:ea typeface="Meiryo" pitchFamily="34" charset="-122"/>
                 <a:cs typeface="Meiryo" pitchFamily="34" charset="-120"/>
               </a:rPr>
-              <a:t>マイルも手数料も、同じ預かり資産に比例します。</a:t>
+              <a:t>マイルの原資は、管理手数料ではなく成功報酬です。</a:t>
             </a:r>
             <a:endParaRPr lang="en-US" sz="1500" dirty="0"/>
           </a:p>
@@ -41733,7 +41754,7 @@
         </p:nvSpPr>
         <p:spPr>
           <a:xfrm>
-            <a:off x="932688" y="4553712"/>
+            <a:off x="932688" y="4572000"/>
             <a:ext cx="4663440" cy="640080"/>
           </a:xfrm>
           <a:prstGeom prst="rect">
@@ -41761,7 +41782,7 @@
                 <a:ea typeface="Meiryo" pitchFamily="34" charset="-122"/>
                 <a:cs typeface="Meiryo" pitchFamily="34" charset="-120"/>
               </a:rPr>
-              <a:t>マイル費用は預かり資産の1.64%、管理手数料は2.5%。どちらも定率なので、規模がどれだけ大きくなっても比は変わりません。手出しが収入を追い越す構造になっていない、というのが答えです。</a:t>
+              <a:t>手数料2.5%から保管1.5%を引くと残りは1.0%。マイル1.64%はこれを超えます。埋めているのは値上がり益25%（年1.5%相当）。先に出して、値上がりで回収する構造です。</a:t>
             </a:r>
             <a:endParaRPr lang="en-US" sz="1050" dirty="0"/>
           </a:p>
@@ -41775,12 +41796,12 @@
         </p:nvSpPr>
         <p:spPr>
           <a:xfrm>
-            <a:off x="6199632" y="4114800"/>
-            <a:ext cx="5394960" cy="1133856"/>
+            <a:off x="6199632" y="4133088"/>
+            <a:ext cx="5394960" cy="1115568"/>
           </a:xfrm>
           <a:prstGeom prst="roundRect">
             <a:avLst>
-              <a:gd name="adj" fmla="val 4839"/>
+              <a:gd name="adj" fmla="val 4918"/>
             </a:avLst>
           </a:prstGeom>
           <a:solidFill>
@@ -41809,7 +41830,7 @@
         </p:nvSpPr>
         <p:spPr>
           <a:xfrm>
-            <a:off x="6565392" y="4242816"/>
+            <a:off x="6565392" y="4261104"/>
             <a:ext cx="4663440" cy="292608"/>
           </a:xfrm>
           <a:prstGeom prst="rect">
@@ -41834,7 +41855,7 @@
                 <a:ea typeface="Meiryo" pitchFamily="34" charset="-122"/>
                 <a:cs typeface="Meiryo" pitchFamily="34" charset="-120"/>
               </a:rPr>
-              <a:t>販売を止めても、ストックだけで回ります。</a:t>
+              <a:t>すべて預かり資産に比例するので、比は変わりません。</a:t>
             </a:r>
             <a:endParaRPr lang="en-US" sz="1500" dirty="0"/>
           </a:p>
@@ -41848,7 +41869,7 @@
         </p:nvSpPr>
         <p:spPr>
           <a:xfrm>
-            <a:off x="6565392" y="4553712"/>
+            <a:off x="6565392" y="4572000"/>
             <a:ext cx="4663440" cy="640080"/>
           </a:xfrm>
           <a:prstGeom prst="rect">
@@ -41876,7 +41897,7 @@
                 <a:ea typeface="Meiryo" pitchFamily="34" charset="-122"/>
                 <a:cs typeface="Meiryo" pitchFamily="34" charset="-120"/>
               </a:rPr>
-              <a:t>新規販売がゼロでも、預かり資産1億あたり年+86万。5億で+431万、10億で+862万。赤字になるのはマイル原価率が67.9%を超えたときだけです。</a:t>
+              <a:t>手数料2.5%・保管1.5%・マイル1.64%・成功報酬1.5%。全部が定率なので、規模が何倍になっても差引0.86%は動きません。手出しが収入を追い越す構造になっていません。</a:t>
             </a:r>
             <a:endParaRPr lang="en-US" sz="1050" dirty="0"/>
           </a:p>
@@ -41941,17 +41962,17 @@
               <a:buNone/>
             </a:pPr>
             <a:r>
-              <a:rPr lang="en-US" sz="1400" b="1" dirty="0">
-                <a:solidFill>
-                  <a:srgbClr val="E8CE78"/>
+              <a:rPr lang="en-US" sz="1350" b="1" dirty="0">
+                <a:solidFill>
+                  <a:srgbClr val="E0A458"/>
                 </a:solidFill>
                 <a:latin typeface="Meiryo" pitchFamily="34" charset="0"/>
                 <a:ea typeface="Meiryo" pitchFamily="34" charset="-122"/>
                 <a:cs typeface="Meiryo" pitchFamily="34" charset="-120"/>
               </a:rPr>
-              <a:t>10年で累計マイル支払 9,007万に対し、累計利益 3億4,743万。マイルが利益を食い潰す局面は訪れません。</a:t>
-            </a:r>
-            <a:endParaRPr lang="en-US" sz="1400" dirty="0"/>
+              <a:t>ただし現金ベースでは年▲64万。成功報酬は出口までキャッシュになりません。ここは資金繰りとして別途見る必要があります。</a:t>
+            </a:r>
+            <a:endParaRPr lang="en-US" sz="1350" dirty="0"/>
           </a:p>
         </p:txBody>
       </p:sp>

--- a/提案資料/WineBank_ワインマイル経済圏構想_黒背景版.pptx
+++ b/提案資料/WineBank_ワインマイル経済圏構想_黒背景版.pptx
@@ -4656,7 +4656,7 @@
                 <a:ea typeface="Meiryo" pitchFamily="34" charset="-122"/>
                 <a:cs typeface="Meiryo" pitchFamily="34" charset="-120"/>
               </a:rPr>
-              <a:t>50,000マイル</a:t>
+              <a:t>35,000マイル</a:t>
             </a:r>
             <a:endParaRPr lang="en-US" sz="2800" dirty="0"/>
           </a:p>
@@ -4698,7 +4698,7 @@
                 <a:ea typeface="Meiryo" pitchFamily="34" charset="-122"/>
                 <a:cs typeface="Meiryo" pitchFamily="34" charset="-120"/>
               </a:rPr>
-              <a:t>年率5%相当。会食・贈答・イベント・オークション・ワイナートに使える</a:t>
+              <a:t>年率3.5%（PRESTIGE）。会食・贈答・イベント・オークション・スクールに使える</a:t>
             </a:r>
             <a:endParaRPr lang="en-US" sz="1100" dirty="0"/>
           </a:p>
@@ -4771,7 +4771,7 @@
                 <a:ea typeface="Meiryo" pitchFamily="34" charset="-122"/>
                 <a:cs typeface="Meiryo" pitchFamily="34" charset="-120"/>
               </a:rPr>
-              <a:t>会員は2.5万円払って、5万円分を受け取る。差額の2.5万円を「貯金」していると考える。</a:t>
+              <a:t>会員は2.5万円払って、3.5万円分を受け取る。差額の1万円を「貯金」していると考える。</a:t>
             </a:r>
             <a:endParaRPr lang="en-US" sz="1900" dirty="0"/>
           </a:p>
@@ -4810,7 +4810,7 @@
                 <a:ea typeface="Meiryo" pitchFamily="34" charset="-122"/>
                 <a:cs typeface="Meiryo" pitchFamily="34" charset="-120"/>
               </a:rPr>
-              <a:t>さらに、値上がり分の75%も会員のものとして残ります。</a:t>
+              <a:t>上位ランクは4.5%・5.5%。さらに値上がり分の75%も会員のものとして残ります。</a:t>
             </a:r>
             <a:endParaRPr lang="en-US" sz="1250" dirty="0"/>
           </a:p>
@@ -6415,7 +6415,7 @@
                 <a:ea typeface="Meiryo" pitchFamily="34" charset="-122"/>
                 <a:cs typeface="Meiryo" pitchFamily="34" charset="-120"/>
               </a:rPr>
-              <a:t>WineBank単体ベース。系列店へはマイル額面×レート×90%を保証。額面100に対する当社コストで表示。</a:t>
+              <a:t>WineBank単体ベース。系列店へはマイル額面×レート×90%を保証。スクール・イベントは原価率50%。額面100に対する当社コスト。</a:t>
             </a:r>
             <a:endParaRPr lang="en-US" sz="1300" dirty="0"/>
           </a:p>
@@ -6489,7 +6489,7 @@
                 <a:gridCol w="2651760"/>
                 <a:gridCol w="1609344"/>
               </a:tblGrid>
-              <a:tr h="365760">
+              <a:tr h="347472">
                 <a:tc>
                   <a:txBody>
                     <a:bodyPr/>
@@ -6831,7 +6831,7 @@
                   </a:tcPr>
                 </a:tc>
               </a:tr>
-              <a:tr h="329184">
+              <a:tr h="292608">
                 <a:tc>
                   <a:txBody>
                     <a:bodyPr/>
@@ -7173,7 +7173,7 @@
                   </a:tcPr>
                 </a:tc>
               </a:tr>
-              <a:tr h="329184">
+              <a:tr h="292608">
                 <a:tc>
                   <a:txBody>
                     <a:bodyPr/>
@@ -7515,7 +7515,7 @@
                   </a:tcPr>
                 </a:tc>
               </a:tr>
-              <a:tr h="329184">
+              <a:tr h="292608">
                 <a:tc>
                   <a:txBody>
                     <a:bodyPr/>
@@ -7857,7 +7857,7 @@
                   </a:tcPr>
                 </a:tc>
               </a:tr>
-              <a:tr h="329184">
+              <a:tr h="292608">
                 <a:tc>
                   <a:txBody>
                     <a:bodyPr/>
@@ -8199,7 +8199,7 @@
                   </a:tcPr>
                 </a:tc>
               </a:tr>
-              <a:tr h="329184">
+              <a:tr h="292608">
                 <a:tc>
                   <a:txBody>
                     <a:bodyPr/>
@@ -8217,7 +8217,7 @@
                           <a:ea typeface="Meiryo" pitchFamily="34" charset="-122"/>
                           <a:cs typeface="Meiryo" pitchFamily="34" charset="-120"/>
                         </a:rPr>
-                        <a:t>ワイン追加購入</a:t>
+                        <a:t>ワインスクール受講料</a:t>
                       </a:r>
                       <a:endParaRPr lang="en-US" sz="1100" dirty="0">
                         <a:latin typeface="Meiryo" charset="0"/>
@@ -8347,6 +8347,690 @@
                       <a:r>
                         <a:rPr lang="en-US" sz="1100" dirty="0">
                           <a:solidFill>
+                            <a:srgbClr val="E0A458"/>
+                          </a:solidFill>
+                          <a:latin typeface="Meiryo" pitchFamily="34" charset="0"/>
+                          <a:ea typeface="Meiryo" pitchFamily="34" charset="-122"/>
+                          <a:cs typeface="Meiryo" pitchFamily="34" charset="-120"/>
+                        </a:rPr>
+                        <a:t>50</a:t>
+                      </a:r>
+                      <a:endParaRPr lang="en-US" sz="1100" dirty="0">
+                        <a:latin typeface="Meiryo" charset="0"/>
+                        <a:ea typeface="Meiryo" charset="0"/>
+                        <a:cs typeface="Meiryo" charset="0"/>
+                      </a:endParaRPr>
+                    </a:p>
+                  </a:txBody>
+                  <a:tcPr marL="91440" marR="91440" marT="45720" marB="45720" anchor="ctr">
+                    <a:lnL w="9525" cap="flat" cmpd="sng" algn="ctr">
+                      <a:solidFill>
+                        <a:srgbClr val="4A3038"/>
+                      </a:solidFill>
+                      <a:prstDash val="solid"/>
+                      <a:round/>
+                      <a:headEnd type="none" w="med" len="med"/>
+                      <a:tailEnd type="none" w="med" len="med"/>
+                    </a:lnL>
+                    <a:lnR w="9525" cap="flat" cmpd="sng" algn="ctr">
+                      <a:solidFill>
+                        <a:srgbClr val="4A3038"/>
+                      </a:solidFill>
+                      <a:prstDash val="solid"/>
+                      <a:round/>
+                      <a:headEnd type="none" w="med" len="med"/>
+                      <a:tailEnd type="none" w="med" len="med"/>
+                    </a:lnR>
+                    <a:lnT w="9525" cap="flat" cmpd="sng" algn="ctr">
+                      <a:solidFill>
+                        <a:srgbClr val="4A3038"/>
+                      </a:solidFill>
+                      <a:prstDash val="solid"/>
+                      <a:round/>
+                      <a:headEnd type="none" w="med" len="med"/>
+                      <a:tailEnd type="none" w="med" len="med"/>
+                    </a:lnT>
+                    <a:lnB w="9525" cap="flat" cmpd="sng" algn="ctr">
+                      <a:solidFill>
+                        <a:srgbClr val="4A3038"/>
+                      </a:solidFill>
+                      <a:prstDash val="solid"/>
+                      <a:round/>
+                      <a:headEnd type="none" w="med" len="med"/>
+                      <a:tailEnd type="none" w="med" len="med"/>
+                    </a:lnB>
+                    <a:solidFill>
+                      <a:srgbClr val="17111A"/>
+                    </a:solidFill>
+                  </a:tcPr>
+                </a:tc>
+                <a:tc>
+                  <a:txBody>
+                    <a:bodyPr/>
+                    <a:lstStyle/>
+                    <a:p>
+                      <a:pPr algn="ctr" indent="0" marL="0">
+                        <a:buNone/>
+                      </a:pPr>
+                      <a:r>
+                        <a:rPr lang="en-US" sz="1100" dirty="0">
+                          <a:solidFill>
+                            <a:srgbClr val="F2EDE6"/>
+                          </a:solidFill>
+                          <a:latin typeface="Meiryo" pitchFamily="34" charset="0"/>
+                          <a:ea typeface="Meiryo" pitchFamily="34" charset="-122"/>
+                          <a:cs typeface="Meiryo" pitchFamily="34" charset="-120"/>
+                        </a:rPr>
+                        <a:t>50</a:t>
+                      </a:r>
+                      <a:endParaRPr lang="en-US" sz="1100" dirty="0">
+                        <a:latin typeface="Meiryo" charset="0"/>
+                        <a:ea typeface="Meiryo" charset="0"/>
+                        <a:cs typeface="Meiryo" charset="0"/>
+                      </a:endParaRPr>
+                    </a:p>
+                  </a:txBody>
+                  <a:tcPr marL="91440" marR="91440" marT="45720" marB="45720" anchor="ctr">
+                    <a:lnL w="9525" cap="flat" cmpd="sng" algn="ctr">
+                      <a:solidFill>
+                        <a:srgbClr val="4A3038"/>
+                      </a:solidFill>
+                      <a:prstDash val="solid"/>
+                      <a:round/>
+                      <a:headEnd type="none" w="med" len="med"/>
+                      <a:tailEnd type="none" w="med" len="med"/>
+                    </a:lnL>
+                    <a:lnR w="9525" cap="flat" cmpd="sng" algn="ctr">
+                      <a:solidFill>
+                        <a:srgbClr val="4A3038"/>
+                      </a:solidFill>
+                      <a:prstDash val="solid"/>
+                      <a:round/>
+                      <a:headEnd type="none" w="med" len="med"/>
+                      <a:tailEnd type="none" w="med" len="med"/>
+                    </a:lnR>
+                    <a:lnT w="9525" cap="flat" cmpd="sng" algn="ctr">
+                      <a:solidFill>
+                        <a:srgbClr val="4A3038"/>
+                      </a:solidFill>
+                      <a:prstDash val="solid"/>
+                      <a:round/>
+                      <a:headEnd type="none" w="med" len="med"/>
+                      <a:tailEnd type="none" w="med" len="med"/>
+                    </a:lnT>
+                    <a:lnB w="9525" cap="flat" cmpd="sng" algn="ctr">
+                      <a:solidFill>
+                        <a:srgbClr val="4A3038"/>
+                      </a:solidFill>
+                      <a:prstDash val="solid"/>
+                      <a:round/>
+                      <a:headEnd type="none" w="med" len="med"/>
+                      <a:tailEnd type="none" w="med" len="med"/>
+                    </a:lnB>
+                    <a:solidFill>
+                      <a:srgbClr val="17111A"/>
+                    </a:solidFill>
+                  </a:tcPr>
+                </a:tc>
+                <a:tc>
+                  <a:txBody>
+                    <a:bodyPr/>
+                    <a:lstStyle/>
+                    <a:p>
+                      <a:pPr algn="ctr" indent="0" marL="0">
+                        <a:buNone/>
+                      </a:pPr>
+                      <a:r>
+                        <a:rPr lang="en-US" sz="1100" dirty="0">
+                          <a:solidFill>
+                            <a:srgbClr val="F2EDE6"/>
+                          </a:solidFill>
+                          <a:latin typeface="Meiryo" pitchFamily="34" charset="0"/>
+                          <a:ea typeface="Meiryo" pitchFamily="34" charset="-122"/>
+                          <a:cs typeface="Meiryo" pitchFamily="34" charset="-120"/>
+                        </a:rPr>
+                        <a:t>○</a:t>
+                      </a:r>
+                      <a:endParaRPr lang="en-US" sz="1100" dirty="0">
+                        <a:latin typeface="Meiryo" charset="0"/>
+                        <a:ea typeface="Meiryo" charset="0"/>
+                        <a:cs typeface="Meiryo" charset="0"/>
+                      </a:endParaRPr>
+                    </a:p>
+                  </a:txBody>
+                  <a:tcPr marL="91440" marR="91440" marT="45720" marB="45720" anchor="ctr">
+                    <a:lnL w="9525" cap="flat" cmpd="sng" algn="ctr">
+                      <a:solidFill>
+                        <a:srgbClr val="4A3038"/>
+                      </a:solidFill>
+                      <a:prstDash val="solid"/>
+                      <a:round/>
+                      <a:headEnd type="none" w="med" len="med"/>
+                      <a:tailEnd type="none" w="med" len="med"/>
+                    </a:lnL>
+                    <a:lnR w="9525" cap="flat" cmpd="sng" algn="ctr">
+                      <a:solidFill>
+                        <a:srgbClr val="4A3038"/>
+                      </a:solidFill>
+                      <a:prstDash val="solid"/>
+                      <a:round/>
+                      <a:headEnd type="none" w="med" len="med"/>
+                      <a:tailEnd type="none" w="med" len="med"/>
+                    </a:lnR>
+                    <a:lnT w="9525" cap="flat" cmpd="sng" algn="ctr">
+                      <a:solidFill>
+                        <a:srgbClr val="4A3038"/>
+                      </a:solidFill>
+                      <a:prstDash val="solid"/>
+                      <a:round/>
+                      <a:headEnd type="none" w="med" len="med"/>
+                      <a:tailEnd type="none" w="med" len="med"/>
+                    </a:lnT>
+                    <a:lnB w="9525" cap="flat" cmpd="sng" algn="ctr">
+                      <a:solidFill>
+                        <a:srgbClr val="4A3038"/>
+                      </a:solidFill>
+                      <a:prstDash val="solid"/>
+                      <a:round/>
+                      <a:headEnd type="none" w="med" len="med"/>
+                      <a:tailEnd type="none" w="med" len="med"/>
+                    </a:lnB>
+                    <a:solidFill>
+                      <a:srgbClr val="17111A"/>
+                    </a:solidFill>
+                  </a:tcPr>
+                </a:tc>
+              </a:tr>
+              <a:tr h="292608">
+                <a:tc>
+                  <a:txBody>
+                    <a:bodyPr/>
+                    <a:lstStyle/>
+                    <a:p>
+                      <a:pPr algn="l" indent="0" marL="0">
+                        <a:buNone/>
+                      </a:pPr>
+                      <a:r>
+                        <a:rPr lang="en-US" sz="1100" dirty="0">
+                          <a:solidFill>
+                            <a:srgbClr val="F2EDE6"/>
+                          </a:solidFill>
+                          <a:latin typeface="Meiryo" pitchFamily="34" charset="0"/>
+                          <a:ea typeface="Meiryo" pitchFamily="34" charset="-122"/>
+                          <a:cs typeface="Meiryo" pitchFamily="34" charset="-120"/>
+                        </a:rPr>
+                        <a:t>会員交流イベント参加費</a:t>
+                      </a:r>
+                      <a:endParaRPr lang="en-US" sz="1100" dirty="0">
+                        <a:latin typeface="Meiryo" charset="0"/>
+                        <a:ea typeface="Meiryo" charset="0"/>
+                        <a:cs typeface="Meiryo" charset="0"/>
+                      </a:endParaRPr>
+                    </a:p>
+                  </a:txBody>
+                  <a:tcPr marL="91440" marR="91440" marT="45720" marB="45720" anchor="ctr">
+                    <a:lnL w="9525" cap="flat" cmpd="sng" algn="ctr">
+                      <a:solidFill>
+                        <a:srgbClr val="4A3038"/>
+                      </a:solidFill>
+                      <a:prstDash val="solid"/>
+                      <a:round/>
+                      <a:headEnd type="none" w="med" len="med"/>
+                      <a:tailEnd type="none" w="med" len="med"/>
+                    </a:lnL>
+                    <a:lnR w="9525" cap="flat" cmpd="sng" algn="ctr">
+                      <a:solidFill>
+                        <a:srgbClr val="4A3038"/>
+                      </a:solidFill>
+                      <a:prstDash val="solid"/>
+                      <a:round/>
+                      <a:headEnd type="none" w="med" len="med"/>
+                      <a:tailEnd type="none" w="med" len="med"/>
+                    </a:lnR>
+                    <a:lnT w="9525" cap="flat" cmpd="sng" algn="ctr">
+                      <a:solidFill>
+                        <a:srgbClr val="4A3038"/>
+                      </a:solidFill>
+                      <a:prstDash val="solid"/>
+                      <a:round/>
+                      <a:headEnd type="none" w="med" len="med"/>
+                      <a:tailEnd type="none" w="med" len="med"/>
+                    </a:lnT>
+                    <a:lnB w="9525" cap="flat" cmpd="sng" algn="ctr">
+                      <a:solidFill>
+                        <a:srgbClr val="4A3038"/>
+                      </a:solidFill>
+                      <a:prstDash val="solid"/>
+                      <a:round/>
+                      <a:headEnd type="none" w="med" len="med"/>
+                      <a:tailEnd type="none" w="med" len="med"/>
+                    </a:lnB>
+                    <a:solidFill>
+                      <a:srgbClr val="17111A"/>
+                    </a:solidFill>
+                  </a:tcPr>
+                </a:tc>
+                <a:tc>
+                  <a:txBody>
+                    <a:bodyPr/>
+                    <a:lstStyle/>
+                    <a:p>
+                      <a:pPr algn="ctr" indent="0" marL="0">
+                        <a:buNone/>
+                      </a:pPr>
+                      <a:r>
+                        <a:rPr lang="en-US" sz="1100" dirty="0">
+                          <a:solidFill>
+                            <a:srgbClr val="F2EDE6"/>
+                          </a:solidFill>
+                          <a:latin typeface="Meiryo" pitchFamily="34" charset="0"/>
+                          <a:ea typeface="Meiryo" pitchFamily="34" charset="-122"/>
+                          <a:cs typeface="Meiryo" pitchFamily="34" charset="-120"/>
+                        </a:rPr>
+                        <a:t>1.0円</a:t>
+                      </a:r>
+                      <a:endParaRPr lang="en-US" sz="1100" dirty="0">
+                        <a:latin typeface="Meiryo" charset="0"/>
+                        <a:ea typeface="Meiryo" charset="0"/>
+                        <a:cs typeface="Meiryo" charset="0"/>
+                      </a:endParaRPr>
+                    </a:p>
+                  </a:txBody>
+                  <a:tcPr marL="91440" marR="91440" marT="45720" marB="45720" anchor="ctr">
+                    <a:lnL w="9525" cap="flat" cmpd="sng" algn="ctr">
+                      <a:solidFill>
+                        <a:srgbClr val="4A3038"/>
+                      </a:solidFill>
+                      <a:prstDash val="solid"/>
+                      <a:round/>
+                      <a:headEnd type="none" w="med" len="med"/>
+                      <a:tailEnd type="none" w="med" len="med"/>
+                    </a:lnL>
+                    <a:lnR w="9525" cap="flat" cmpd="sng" algn="ctr">
+                      <a:solidFill>
+                        <a:srgbClr val="4A3038"/>
+                      </a:solidFill>
+                      <a:prstDash val="solid"/>
+                      <a:round/>
+                      <a:headEnd type="none" w="med" len="med"/>
+                      <a:tailEnd type="none" w="med" len="med"/>
+                    </a:lnR>
+                    <a:lnT w="9525" cap="flat" cmpd="sng" algn="ctr">
+                      <a:solidFill>
+                        <a:srgbClr val="4A3038"/>
+                      </a:solidFill>
+                      <a:prstDash val="solid"/>
+                      <a:round/>
+                      <a:headEnd type="none" w="med" len="med"/>
+                      <a:tailEnd type="none" w="med" len="med"/>
+                    </a:lnT>
+                    <a:lnB w="9525" cap="flat" cmpd="sng" algn="ctr">
+                      <a:solidFill>
+                        <a:srgbClr val="4A3038"/>
+                      </a:solidFill>
+                      <a:prstDash val="solid"/>
+                      <a:round/>
+                      <a:headEnd type="none" w="med" len="med"/>
+                      <a:tailEnd type="none" w="med" len="med"/>
+                    </a:lnB>
+                    <a:solidFill>
+                      <a:srgbClr val="17111A"/>
+                    </a:solidFill>
+                  </a:tcPr>
+                </a:tc>
+                <a:tc>
+                  <a:txBody>
+                    <a:bodyPr/>
+                    <a:lstStyle/>
+                    <a:p>
+                      <a:pPr algn="ctr" indent="0" marL="0">
+                        <a:buNone/>
+                      </a:pPr>
+                      <a:r>
+                        <a:rPr lang="en-US" sz="1100" dirty="0">
+                          <a:solidFill>
+                            <a:srgbClr val="E0A458"/>
+                          </a:solidFill>
+                          <a:latin typeface="Meiryo" pitchFamily="34" charset="0"/>
+                          <a:ea typeface="Meiryo" pitchFamily="34" charset="-122"/>
+                          <a:cs typeface="Meiryo" pitchFamily="34" charset="-120"/>
+                        </a:rPr>
+                        <a:t>50</a:t>
+                      </a:r>
+                      <a:endParaRPr lang="en-US" sz="1100" dirty="0">
+                        <a:latin typeface="Meiryo" charset="0"/>
+                        <a:ea typeface="Meiryo" charset="0"/>
+                        <a:cs typeface="Meiryo" charset="0"/>
+                      </a:endParaRPr>
+                    </a:p>
+                  </a:txBody>
+                  <a:tcPr marL="91440" marR="91440" marT="45720" marB="45720" anchor="ctr">
+                    <a:lnL w="9525" cap="flat" cmpd="sng" algn="ctr">
+                      <a:solidFill>
+                        <a:srgbClr val="4A3038"/>
+                      </a:solidFill>
+                      <a:prstDash val="solid"/>
+                      <a:round/>
+                      <a:headEnd type="none" w="med" len="med"/>
+                      <a:tailEnd type="none" w="med" len="med"/>
+                    </a:lnL>
+                    <a:lnR w="9525" cap="flat" cmpd="sng" algn="ctr">
+                      <a:solidFill>
+                        <a:srgbClr val="4A3038"/>
+                      </a:solidFill>
+                      <a:prstDash val="solid"/>
+                      <a:round/>
+                      <a:headEnd type="none" w="med" len="med"/>
+                      <a:tailEnd type="none" w="med" len="med"/>
+                    </a:lnR>
+                    <a:lnT w="9525" cap="flat" cmpd="sng" algn="ctr">
+                      <a:solidFill>
+                        <a:srgbClr val="4A3038"/>
+                      </a:solidFill>
+                      <a:prstDash val="solid"/>
+                      <a:round/>
+                      <a:headEnd type="none" w="med" len="med"/>
+                      <a:tailEnd type="none" w="med" len="med"/>
+                    </a:lnT>
+                    <a:lnB w="9525" cap="flat" cmpd="sng" algn="ctr">
+                      <a:solidFill>
+                        <a:srgbClr val="4A3038"/>
+                      </a:solidFill>
+                      <a:prstDash val="solid"/>
+                      <a:round/>
+                      <a:headEnd type="none" w="med" len="med"/>
+                      <a:tailEnd type="none" w="med" len="med"/>
+                    </a:lnB>
+                    <a:solidFill>
+                      <a:srgbClr val="17111A"/>
+                    </a:solidFill>
+                  </a:tcPr>
+                </a:tc>
+                <a:tc>
+                  <a:txBody>
+                    <a:bodyPr/>
+                    <a:lstStyle/>
+                    <a:p>
+                      <a:pPr algn="ctr" indent="0" marL="0">
+                        <a:buNone/>
+                      </a:pPr>
+                      <a:r>
+                        <a:rPr lang="en-US" sz="1100" dirty="0">
+                          <a:solidFill>
+                            <a:srgbClr val="F2EDE6"/>
+                          </a:solidFill>
+                          <a:latin typeface="Meiryo" pitchFamily="34" charset="0"/>
+                          <a:ea typeface="Meiryo" pitchFamily="34" charset="-122"/>
+                          <a:cs typeface="Meiryo" pitchFamily="34" charset="-120"/>
+                        </a:rPr>
+                        <a:t>50</a:t>
+                      </a:r>
+                      <a:endParaRPr lang="en-US" sz="1100" dirty="0">
+                        <a:latin typeface="Meiryo" charset="0"/>
+                        <a:ea typeface="Meiryo" charset="0"/>
+                        <a:cs typeface="Meiryo" charset="0"/>
+                      </a:endParaRPr>
+                    </a:p>
+                  </a:txBody>
+                  <a:tcPr marL="91440" marR="91440" marT="45720" marB="45720" anchor="ctr">
+                    <a:lnL w="9525" cap="flat" cmpd="sng" algn="ctr">
+                      <a:solidFill>
+                        <a:srgbClr val="4A3038"/>
+                      </a:solidFill>
+                      <a:prstDash val="solid"/>
+                      <a:round/>
+                      <a:headEnd type="none" w="med" len="med"/>
+                      <a:tailEnd type="none" w="med" len="med"/>
+                    </a:lnL>
+                    <a:lnR w="9525" cap="flat" cmpd="sng" algn="ctr">
+                      <a:solidFill>
+                        <a:srgbClr val="4A3038"/>
+                      </a:solidFill>
+                      <a:prstDash val="solid"/>
+                      <a:round/>
+                      <a:headEnd type="none" w="med" len="med"/>
+                      <a:tailEnd type="none" w="med" len="med"/>
+                    </a:lnR>
+                    <a:lnT w="9525" cap="flat" cmpd="sng" algn="ctr">
+                      <a:solidFill>
+                        <a:srgbClr val="4A3038"/>
+                      </a:solidFill>
+                      <a:prstDash val="solid"/>
+                      <a:round/>
+                      <a:headEnd type="none" w="med" len="med"/>
+                      <a:tailEnd type="none" w="med" len="med"/>
+                    </a:lnT>
+                    <a:lnB w="9525" cap="flat" cmpd="sng" algn="ctr">
+                      <a:solidFill>
+                        <a:srgbClr val="4A3038"/>
+                      </a:solidFill>
+                      <a:prstDash val="solid"/>
+                      <a:round/>
+                      <a:headEnd type="none" w="med" len="med"/>
+                      <a:tailEnd type="none" w="med" len="med"/>
+                    </a:lnB>
+                    <a:solidFill>
+                      <a:srgbClr val="17111A"/>
+                    </a:solidFill>
+                  </a:tcPr>
+                </a:tc>
+                <a:tc>
+                  <a:txBody>
+                    <a:bodyPr/>
+                    <a:lstStyle/>
+                    <a:p>
+                      <a:pPr algn="ctr" indent="0" marL="0">
+                        <a:buNone/>
+                      </a:pPr>
+                      <a:r>
+                        <a:rPr lang="en-US" sz="1100" dirty="0">
+                          <a:solidFill>
+                            <a:srgbClr val="F2EDE6"/>
+                          </a:solidFill>
+                          <a:latin typeface="Meiryo" pitchFamily="34" charset="0"/>
+                          <a:ea typeface="Meiryo" pitchFamily="34" charset="-122"/>
+                          <a:cs typeface="Meiryo" pitchFamily="34" charset="-120"/>
+                        </a:rPr>
+                        <a:t>○</a:t>
+                      </a:r>
+                      <a:endParaRPr lang="en-US" sz="1100" dirty="0">
+                        <a:latin typeface="Meiryo" charset="0"/>
+                        <a:ea typeface="Meiryo" charset="0"/>
+                        <a:cs typeface="Meiryo" charset="0"/>
+                      </a:endParaRPr>
+                    </a:p>
+                  </a:txBody>
+                  <a:tcPr marL="91440" marR="91440" marT="45720" marB="45720" anchor="ctr">
+                    <a:lnL w="9525" cap="flat" cmpd="sng" algn="ctr">
+                      <a:solidFill>
+                        <a:srgbClr val="4A3038"/>
+                      </a:solidFill>
+                      <a:prstDash val="solid"/>
+                      <a:round/>
+                      <a:headEnd type="none" w="med" len="med"/>
+                      <a:tailEnd type="none" w="med" len="med"/>
+                    </a:lnL>
+                    <a:lnR w="9525" cap="flat" cmpd="sng" algn="ctr">
+                      <a:solidFill>
+                        <a:srgbClr val="4A3038"/>
+                      </a:solidFill>
+                      <a:prstDash val="solid"/>
+                      <a:round/>
+                      <a:headEnd type="none" w="med" len="med"/>
+                      <a:tailEnd type="none" w="med" len="med"/>
+                    </a:lnR>
+                    <a:lnT w="9525" cap="flat" cmpd="sng" algn="ctr">
+                      <a:solidFill>
+                        <a:srgbClr val="4A3038"/>
+                      </a:solidFill>
+                      <a:prstDash val="solid"/>
+                      <a:round/>
+                      <a:headEnd type="none" w="med" len="med"/>
+                      <a:tailEnd type="none" w="med" len="med"/>
+                    </a:lnT>
+                    <a:lnB w="9525" cap="flat" cmpd="sng" algn="ctr">
+                      <a:solidFill>
+                        <a:srgbClr val="4A3038"/>
+                      </a:solidFill>
+                      <a:prstDash val="solid"/>
+                      <a:round/>
+                      <a:headEnd type="none" w="med" len="med"/>
+                      <a:tailEnd type="none" w="med" len="med"/>
+                    </a:lnB>
+                    <a:solidFill>
+                      <a:srgbClr val="17111A"/>
+                    </a:solidFill>
+                  </a:tcPr>
+                </a:tc>
+              </a:tr>
+              <a:tr h="292608">
+                <a:tc>
+                  <a:txBody>
+                    <a:bodyPr/>
+                    <a:lstStyle/>
+                    <a:p>
+                      <a:pPr algn="l" indent="0" marL="0">
+                        <a:buNone/>
+                      </a:pPr>
+                      <a:r>
+                        <a:rPr lang="en-US" sz="1100" dirty="0">
+                          <a:solidFill>
+                            <a:srgbClr val="F2EDE6"/>
+                          </a:solidFill>
+                          <a:latin typeface="Meiryo" pitchFamily="34" charset="0"/>
+                          <a:ea typeface="Meiryo" pitchFamily="34" charset="-122"/>
+                          <a:cs typeface="Meiryo" pitchFamily="34" charset="-120"/>
+                        </a:rPr>
+                        <a:t>ワイン追加購入</a:t>
+                      </a:r>
+                      <a:endParaRPr lang="en-US" sz="1100" dirty="0">
+                        <a:latin typeface="Meiryo" charset="0"/>
+                        <a:ea typeface="Meiryo" charset="0"/>
+                        <a:cs typeface="Meiryo" charset="0"/>
+                      </a:endParaRPr>
+                    </a:p>
+                  </a:txBody>
+                  <a:tcPr marL="91440" marR="91440" marT="45720" marB="45720" anchor="ctr">
+                    <a:lnL w="9525" cap="flat" cmpd="sng" algn="ctr">
+                      <a:solidFill>
+                        <a:srgbClr val="4A3038"/>
+                      </a:solidFill>
+                      <a:prstDash val="solid"/>
+                      <a:round/>
+                      <a:headEnd type="none" w="med" len="med"/>
+                      <a:tailEnd type="none" w="med" len="med"/>
+                    </a:lnL>
+                    <a:lnR w="9525" cap="flat" cmpd="sng" algn="ctr">
+                      <a:solidFill>
+                        <a:srgbClr val="4A3038"/>
+                      </a:solidFill>
+                      <a:prstDash val="solid"/>
+                      <a:round/>
+                      <a:headEnd type="none" w="med" len="med"/>
+                      <a:tailEnd type="none" w="med" len="med"/>
+                    </a:lnR>
+                    <a:lnT w="9525" cap="flat" cmpd="sng" algn="ctr">
+                      <a:solidFill>
+                        <a:srgbClr val="4A3038"/>
+                      </a:solidFill>
+                      <a:prstDash val="solid"/>
+                      <a:round/>
+                      <a:headEnd type="none" w="med" len="med"/>
+                      <a:tailEnd type="none" w="med" len="med"/>
+                    </a:lnT>
+                    <a:lnB w="9525" cap="flat" cmpd="sng" algn="ctr">
+                      <a:solidFill>
+                        <a:srgbClr val="4A3038"/>
+                      </a:solidFill>
+                      <a:prstDash val="solid"/>
+                      <a:round/>
+                      <a:headEnd type="none" w="med" len="med"/>
+                      <a:tailEnd type="none" w="med" len="med"/>
+                    </a:lnB>
+                    <a:solidFill>
+                      <a:srgbClr val="17111A"/>
+                    </a:solidFill>
+                  </a:tcPr>
+                </a:tc>
+                <a:tc>
+                  <a:txBody>
+                    <a:bodyPr/>
+                    <a:lstStyle/>
+                    <a:p>
+                      <a:pPr algn="ctr" indent="0" marL="0">
+                        <a:buNone/>
+                      </a:pPr>
+                      <a:r>
+                        <a:rPr lang="en-US" sz="1100" dirty="0">
+                          <a:solidFill>
+                            <a:srgbClr val="F2EDE6"/>
+                          </a:solidFill>
+                          <a:latin typeface="Meiryo" pitchFamily="34" charset="0"/>
+                          <a:ea typeface="Meiryo" pitchFamily="34" charset="-122"/>
+                          <a:cs typeface="Meiryo" pitchFamily="34" charset="-120"/>
+                        </a:rPr>
+                        <a:t>1.0円</a:t>
+                      </a:r>
+                      <a:endParaRPr lang="en-US" sz="1100" dirty="0">
+                        <a:latin typeface="Meiryo" charset="0"/>
+                        <a:ea typeface="Meiryo" charset="0"/>
+                        <a:cs typeface="Meiryo" charset="0"/>
+                      </a:endParaRPr>
+                    </a:p>
+                  </a:txBody>
+                  <a:tcPr marL="91440" marR="91440" marT="45720" marB="45720" anchor="ctr">
+                    <a:lnL w="9525" cap="flat" cmpd="sng" algn="ctr">
+                      <a:solidFill>
+                        <a:srgbClr val="4A3038"/>
+                      </a:solidFill>
+                      <a:prstDash val="solid"/>
+                      <a:round/>
+                      <a:headEnd type="none" w="med" len="med"/>
+                      <a:tailEnd type="none" w="med" len="med"/>
+                    </a:lnL>
+                    <a:lnR w="9525" cap="flat" cmpd="sng" algn="ctr">
+                      <a:solidFill>
+                        <a:srgbClr val="4A3038"/>
+                      </a:solidFill>
+                      <a:prstDash val="solid"/>
+                      <a:round/>
+                      <a:headEnd type="none" w="med" len="med"/>
+                      <a:tailEnd type="none" w="med" len="med"/>
+                    </a:lnR>
+                    <a:lnT w="9525" cap="flat" cmpd="sng" algn="ctr">
+                      <a:solidFill>
+                        <a:srgbClr val="4A3038"/>
+                      </a:solidFill>
+                      <a:prstDash val="solid"/>
+                      <a:round/>
+                      <a:headEnd type="none" w="med" len="med"/>
+                      <a:tailEnd type="none" w="med" len="med"/>
+                    </a:lnT>
+                    <a:lnB w="9525" cap="flat" cmpd="sng" algn="ctr">
+                      <a:solidFill>
+                        <a:srgbClr val="4A3038"/>
+                      </a:solidFill>
+                      <a:prstDash val="solid"/>
+                      <a:round/>
+                      <a:headEnd type="none" w="med" len="med"/>
+                      <a:tailEnd type="none" w="med" len="med"/>
+                    </a:lnB>
+                    <a:solidFill>
+                      <a:srgbClr val="17111A"/>
+                    </a:solidFill>
+                  </a:tcPr>
+                </a:tc>
+                <a:tc>
+                  <a:txBody>
+                    <a:bodyPr/>
+                    <a:lstStyle/>
+                    <a:p>
+                      <a:pPr algn="ctr" indent="0" marL="0">
+                        <a:buNone/>
+                      </a:pPr>
+                      <a:r>
+                        <a:rPr lang="en-US" sz="1100" dirty="0">
+                          <a:solidFill>
                             <a:srgbClr val="D96A6A"/>
                           </a:solidFill>
                           <a:latin typeface="Meiryo" pitchFamily="34" charset="0"/>
@@ -8541,7 +9225,7 @@
                   </a:tcPr>
                 </a:tc>
               </a:tr>
-              <a:tr h="329184">
+              <a:tr h="292608">
                 <a:tc>
                   <a:txBody>
                     <a:bodyPr/>
@@ -8883,7 +9567,7 @@
                   </a:tcPr>
                 </a:tc>
               </a:tr>
-              <a:tr h="329184">
+              <a:tr h="292608">
                 <a:tc>
                   <a:txBody>
                     <a:bodyPr/>
@@ -9237,7 +9921,7 @@
         </p:nvSpPr>
         <p:spPr>
           <a:xfrm>
-            <a:off x="566928" y="4480560"/>
+            <a:off x="566928" y="4626864"/>
             <a:ext cx="11027664" cy="256032"/>
           </a:xfrm>
           <a:prstGeom prst="rect">
@@ -9254,7 +9938,7 @@
               <a:buNone/>
             </a:pPr>
             <a:r>
-              <a:rPr lang="en-US" sz="1050" dirty="0">
+              <a:rPr lang="en-US" sz="1000" dirty="0">
                 <a:solidFill>
                   <a:srgbClr val="C9A227"/>
                 </a:solidFill>
@@ -9262,9 +9946,9 @@
                 <a:ea typeface="Meiryo" pitchFamily="34" charset="-122"/>
                 <a:cs typeface="Meiryo" pitchFamily="34" charset="-120"/>
               </a:rPr>
-              <a:t>想定ミックス：系列店35% ／ グランメゾン20% ／ CLUB充当15% ／ オークション10% ／ 追加購入5% ／ 失効15%　→　加重平均 単体44.5%</a:t>
-            </a:r>
-            <a:endParaRPr lang="en-US" sz="1050" dirty="0"/>
+              <a:t>想定ミックス：系列店25% ／ グランメゾン18% ／ CLUB充当12% ／ オークション12% ／ スクール10% ／ イベント8% ／ 追加購入5% ／ 失効10%　→　加重平均 43.6%</a:t>
+            </a:r>
+            <a:endParaRPr lang="en-US" sz="1000" dirty="0"/>
           </a:p>
         </p:txBody>
       </p:sp>
@@ -9276,12 +9960,12 @@
         </p:nvSpPr>
         <p:spPr>
           <a:xfrm>
-            <a:off x="566928" y="4828032"/>
-            <a:ext cx="5394960" cy="1225296"/>
+            <a:off x="566928" y="4956048"/>
+            <a:ext cx="5394960" cy="1097280"/>
           </a:xfrm>
           <a:prstGeom prst="roundRect">
             <a:avLst>
-              <a:gd name="adj" fmla="val 4478"/>
+              <a:gd name="adj" fmla="val 5000"/>
             </a:avLst>
           </a:prstGeom>
           <a:solidFill>
@@ -9310,8 +9994,8 @@
         </p:nvSpPr>
         <p:spPr>
           <a:xfrm>
-            <a:off x="932688" y="4956048"/>
-            <a:ext cx="4663440" cy="310896"/>
+            <a:off x="932688" y="5065776"/>
+            <a:ext cx="4663440" cy="292608"/>
           </a:xfrm>
           <a:prstGeom prst="rect">
             <a:avLst/>
@@ -9327,7 +10011,7 @@
               <a:buNone/>
             </a:pPr>
             <a:r>
-              <a:rPr lang="en-US" sz="1700" b="1" dirty="0">
+              <a:rPr lang="en-US" sz="1600" b="1" dirty="0">
                 <a:solidFill>
                   <a:srgbClr val="E8CE78"/>
                 </a:solidFill>
@@ -9335,9 +10019,9 @@
                 <a:ea typeface="Meiryo" pitchFamily="34" charset="-122"/>
                 <a:cs typeface="Meiryo" pitchFamily="34" charset="-120"/>
               </a:rPr>
-              <a:t>損益分岐は 2つあります</a:t>
-            </a:r>
-            <a:endParaRPr lang="en-US" sz="1700" dirty="0"/>
+              <a:t>損益分岐は 46.7%。想定は 43.6%。</a:t>
+            </a:r>
+            <a:endParaRPr lang="en-US" sz="1600" dirty="0"/>
           </a:p>
         </p:txBody>
       </p:sp>
@@ -9349,8 +10033,8 @@
         </p:nvSpPr>
         <p:spPr>
           <a:xfrm>
-            <a:off x="932688" y="5303520"/>
-            <a:ext cx="4663440" cy="676656"/>
+            <a:off x="932688" y="5358384"/>
+            <a:ext cx="4663440" cy="603504"/>
           </a:xfrm>
           <a:prstGeom prst="rect">
             <a:avLst/>
@@ -9364,12 +10048,12 @@
           <a:p>
             <a:pPr indent="0" marL="0">
               <a:lnSpc>
-                <a:spcPts val="1500"/>
+                <a:spcPts val="1400"/>
               </a:lnSpc>
               <a:buNone/>
             </a:pPr>
             <a:r>
-              <a:rPr lang="en-US" sz="1050" dirty="0">
+              <a:rPr lang="en-US" sz="1000" dirty="0">
                 <a:solidFill>
                   <a:srgbClr val="F2EDE6"/>
                 </a:solidFill>
@@ -9377,9 +10061,9 @@
                 <a:ea typeface="Meiryo" pitchFamily="34" charset="-122"/>
                 <a:cs typeface="Meiryo" pitchFamily="34" charset="-120"/>
               </a:rPr>
-              <a:t>現金ベース（手数料2.5%−保管1.5%）÷ 発行3.68% ＝ 27.2%。成功報酬（年1.5%相当）を含めると 73.1%。想定ミックスの44.5%は、現金では届かず、成功報酬込みなら29ポイントの余裕があります。</a:t>
-            </a:r>
-            <a:endParaRPr lang="en-US" sz="1050" dirty="0"/>
+              <a:t>（手数料2.5% − 保管1.05% ＋ オークション0.5%）÷ 発行4.18% ＝ 46.7%。現金ベースでも3ポイントの余裕があり、成功報酬を含めればさらに厚くなります。</a:t>
+            </a:r>
+            <a:endParaRPr lang="en-US" sz="1000" dirty="0"/>
           </a:p>
         </p:txBody>
       </p:sp>
@@ -9391,12 +10075,12 @@
         </p:nvSpPr>
         <p:spPr>
           <a:xfrm>
-            <a:off x="6199632" y="4828032"/>
-            <a:ext cx="5394960" cy="1225296"/>
+            <a:off x="6199632" y="4956048"/>
+            <a:ext cx="5394960" cy="1097280"/>
           </a:xfrm>
           <a:prstGeom prst="roundRect">
             <a:avLst>
-              <a:gd name="adj" fmla="val 4478"/>
+              <a:gd name="adj" fmla="val 5000"/>
             </a:avLst>
           </a:prstGeom>
           <a:solidFill>
@@ -9425,8 +10109,8 @@
         </p:nvSpPr>
         <p:spPr>
           <a:xfrm>
-            <a:off x="6565392" y="4956048"/>
-            <a:ext cx="4663440" cy="310896"/>
+            <a:off x="6565392" y="5065776"/>
+            <a:ext cx="4663440" cy="292608"/>
           </a:xfrm>
           <a:prstGeom prst="rect">
             <a:avLst/>
@@ -9450,7 +10134,7 @@
                 <a:ea typeface="Meiryo" pitchFamily="34" charset="-122"/>
                 <a:cs typeface="Meiryo" pitchFamily="34" charset="-120"/>
               </a:rPr>
-              <a:t>だからこそ、どこで使わせるかを設計する</a:t>
+              <a:t>余裕は薄い。だから誘導の設計で決まる。</a:t>
             </a:r>
             <a:endParaRPr lang="en-US" sz="1500" dirty="0"/>
           </a:p>
@@ -9464,8 +10148,8 @@
         </p:nvSpPr>
         <p:spPr>
           <a:xfrm>
-            <a:off x="6565392" y="5303520"/>
-            <a:ext cx="4663440" cy="676656"/>
+            <a:off x="6565392" y="5358384"/>
+            <a:ext cx="4663440" cy="603504"/>
           </a:xfrm>
           <a:prstGeom prst="rect">
             <a:avLst/>
@@ -9479,12 +10163,12 @@
           <a:p>
             <a:pPr indent="0" marL="0">
               <a:lnSpc>
-                <a:spcPts val="1500"/>
+                <a:spcPts val="1400"/>
               </a:lnSpc>
               <a:buNone/>
             </a:pPr>
             <a:r>
-              <a:rPr lang="en-US" sz="1050" dirty="0">
+              <a:rPr lang="en-US" sz="1000" dirty="0">
                 <a:solidFill>
                   <a:srgbClr val="A2908C"/>
                 </a:solidFill>
@@ -9492,9 +10176,9 @@
                 <a:ea typeface="Meiryo" pitchFamily="34" charset="-122"/>
                 <a:cs typeface="Meiryo" pitchFamily="34" charset="-120"/>
               </a:rPr>
-              <a:t>原価ゼロのオークション・CLUB充当へ誘導できれば33.2%まで下がり、現金ベースの赤字も縮みます。全額を系列店1.0円で使われると90%となり、成功報酬を含めても赤字です。</a:t>
-            </a:r>
-            <a:endParaRPr lang="en-US" sz="1050" dirty="0"/>
+              <a:t>系列店1.0円に偏るほど90%へ近づき赤字化します。原価ゼロのオークション・CLUB充当、原価50%のスクール・イベントへ誘導するほど収支は改善します。</a:t>
+            </a:r>
+            <a:endParaRPr lang="en-US" sz="1000" dirty="0"/>
           </a:p>
         </p:txBody>
       </p:sp>
@@ -23507,7 +24191,7 @@
                           <a:ea typeface="Meiryo" pitchFamily="34" charset="-122"/>
                           <a:cs typeface="Meiryo" pitchFamily="34" charset="-120"/>
                         </a:rPr>
-                        <a:t>3%</a:t>
+                        <a:t>3.5%</a:t>
                       </a:r>
                       <a:endParaRPr lang="en-US" sz="1100" dirty="0">
                         <a:latin typeface="Meiryo" charset="0"/>
@@ -23575,7 +24259,7 @@
                           <a:ea typeface="Meiryo" pitchFamily="34" charset="-122"/>
                           <a:cs typeface="Meiryo" pitchFamily="34" charset="-120"/>
                         </a:rPr>
-                        <a:t>4%</a:t>
+                        <a:t>4.5%</a:t>
                       </a:r>
                       <a:endParaRPr lang="en-US" sz="1100" dirty="0">
                         <a:latin typeface="Meiryo" charset="0"/>
@@ -23643,7 +24327,7 @@
                           <a:ea typeface="Meiryo" pitchFamily="34" charset="-122"/>
                           <a:cs typeface="Meiryo" pitchFamily="34" charset="-120"/>
                         </a:rPr>
-                        <a:t>5%</a:t>
+                        <a:t>5.5%</a:t>
                       </a:r>
                       <a:endParaRPr lang="en-US" sz="1100" dirty="0">
                         <a:latin typeface="Meiryo" charset="0"/>
@@ -23781,7 +24465,7 @@
                           <a:ea typeface="Meiryo" pitchFamily="34" charset="-122"/>
                           <a:cs typeface="Meiryo" pitchFamily="34" charset="-120"/>
                         </a:rPr>
-                        <a:t>+0.5%</a:t>
+                        <a:t>+1.0%</a:t>
                       </a:r>
                       <a:endParaRPr lang="en-US" sz="1100" dirty="0">
                         <a:latin typeface="Meiryo" charset="0"/>
@@ -23849,7 +24533,7 @@
                           <a:ea typeface="Meiryo" pitchFamily="34" charset="-122"/>
                           <a:cs typeface="Meiryo" pitchFamily="34" charset="-120"/>
                         </a:rPr>
-                        <a:t>+1.5%</a:t>
+                        <a:t>+2.0%</a:t>
                       </a:r>
                       <a:endParaRPr lang="en-US" sz="1100" dirty="0">
                         <a:latin typeface="Meiryo" charset="0"/>
@@ -23917,7 +24601,7 @@
                           <a:ea typeface="Meiryo" pitchFamily="34" charset="-122"/>
                           <a:cs typeface="Meiryo" pitchFamily="34" charset="-120"/>
                         </a:rPr>
-                        <a:t>+2.5%</a:t>
+                        <a:t>+3.0%</a:t>
                       </a:r>
                       <a:endParaRPr lang="en-US" sz="1100" dirty="0">
                         <a:latin typeface="Meiryo" charset="0"/>
@@ -25293,7 +25977,7 @@
                 <a:ea typeface="Meiryo" pitchFamily="34" charset="-122"/>
                 <a:cs typeface="Meiryo" pitchFamily="34" charset="-120"/>
               </a:rPr>
-              <a:t>「上のランクだと還元が1.7倍」「未公開ワインが先に届く」は伝わります。レートを刻むのはやめ、体感できる2軸だけに集約します。</a:t>
+              <a:t>100万でも実質+1.0%を確保。額面0.5pp上げても当社の実費用は0.22ppしか増えないため、還元率は上げるほうが費用対効果が高い設計です。</a:t>
             </a:r>
             <a:endParaRPr lang="en-US" sz="1050" dirty="0"/>
           </a:p>
@@ -36406,7 +37090,7 @@
                 <a:ea typeface="Meiryo" pitchFamily="34" charset="-122"/>
                 <a:cs typeface="Meiryo" pitchFamily="34" charset="-120"/>
               </a:rPr>
-              <a:t>WineBank単体ベース。ワイン1億円／値上がり6%・金利3%・保管料1.5%・粗利30%・管理手数料2.5%</a:t>
+              <a:t>WineBank単体ベース。ワイン1億円／値上がり6%・金利3%・保管料210円/本（鈴与実額）・粗利30%・管理手数料2.5%</a:t>
             </a:r>
             <a:endParaRPr lang="en-US" sz="1300" dirty="0"/>
           </a:p>
@@ -36484,7 +37168,7 @@
                 <a:ea typeface="Meiryo" pitchFamily="34" charset="-122"/>
                 <a:cs typeface="Meiryo" pitchFamily="34" charset="-120"/>
               </a:rPr>
-              <a:t>販売ミックス：100万×52名 ＋ 400万×7名 ＋ 1,000万×2名 ＝ 1億円　／　マイル発行 368万円（原価率44.5%＝想定交換ミックス）　※単位：万円</a:t>
+              <a:t>販売ミックス：100万×52名 ＋ 400万×7名 ＋ 1,000万×2名 ＝ 1億円　／　還元率 3.5/4.5/5.5%　マイル発行 418万円（原価率43.6%）　※単位：万円</a:t>
             </a:r>
             <a:endParaRPr lang="en-US" sz="1050" dirty="0"/>
           </a:p>
@@ -36867,7 +37551,7 @@
                           <a:ea typeface="Meiryo" pitchFamily="34" charset="-122"/>
                           <a:cs typeface="Meiryo" pitchFamily="34" charset="-120"/>
                         </a:rPr>
-                        <a:t>▲450</a:t>
+                        <a:t>▲405</a:t>
                       </a:r>
                       <a:endParaRPr lang="en-US" sz="1100" dirty="0">
                         <a:latin typeface="Meiryo" charset="0"/>
@@ -36935,7 +37619,7 @@
                           <a:ea typeface="Meiryo" pitchFamily="34" charset="-122"/>
                           <a:cs typeface="Meiryo" pitchFamily="34" charset="-120"/>
                         </a:rPr>
-                        <a:t>+2,351</a:t>
+                        <a:t>+2,495</a:t>
                       </a:r>
                       <a:endParaRPr lang="en-US" sz="1100" dirty="0">
                         <a:latin typeface="Meiryo" charset="0"/>
@@ -37003,7 +37687,7 @@
                           <a:ea typeface="Meiryo" pitchFamily="34" charset="-122"/>
                           <a:cs typeface="Meiryo" pitchFamily="34" charset="-120"/>
                         </a:rPr>
-                        <a:t>+2,801</a:t>
+                        <a:t>+2,900</a:t>
                       </a:r>
                       <a:endParaRPr lang="en-US" sz="1100" dirty="0">
                         <a:latin typeface="Meiryo" charset="0"/>
@@ -37141,7 +37825,7 @@
                           <a:ea typeface="Meiryo" pitchFamily="34" charset="-122"/>
                           <a:cs typeface="Meiryo" pitchFamily="34" charset="-120"/>
                         </a:rPr>
-                        <a:t>▲450</a:t>
+                        <a:t>▲405</a:t>
                       </a:r>
                       <a:endParaRPr lang="en-US" sz="1100" dirty="0">
                         <a:latin typeface="Meiryo" charset="0"/>
@@ -37209,7 +37893,7 @@
                           <a:ea typeface="Meiryo" pitchFamily="34" charset="-122"/>
                           <a:cs typeface="Meiryo" pitchFamily="34" charset="-120"/>
                         </a:rPr>
-                        <a:t>+9,351</a:t>
+                        <a:t>+9,495</a:t>
                       </a:r>
                       <a:endParaRPr lang="en-US" sz="1100" dirty="0">
                         <a:latin typeface="Meiryo" charset="0"/>
@@ -37277,7 +37961,7 @@
                           <a:ea typeface="Meiryo" pitchFamily="34" charset="-122"/>
                           <a:cs typeface="Meiryo" pitchFamily="34" charset="-120"/>
                         </a:rPr>
-                        <a:t>+9,801</a:t>
+                        <a:t>+9,900</a:t>
                       </a:r>
                       <a:endParaRPr lang="en-US" sz="1100" dirty="0">
                         <a:latin typeface="Meiryo" charset="0"/>
@@ -37415,7 +38099,7 @@
                           <a:ea typeface="Meiryo" pitchFamily="34" charset="-122"/>
                           <a:cs typeface="Meiryo" pitchFamily="34" charset="-120"/>
                         </a:rPr>
-                        <a:t>▲450</a:t>
+                        <a:t>▲405</a:t>
                       </a:r>
                       <a:endParaRPr lang="en-US" sz="1100" dirty="0">
                         <a:latin typeface="Meiryo" charset="0"/>
@@ -37483,7 +38167,7 @@
                           <a:ea typeface="Meiryo" pitchFamily="34" charset="-122"/>
                           <a:cs typeface="Meiryo" pitchFamily="34" charset="-120"/>
                         </a:rPr>
-                        <a:t>▲649</a:t>
+                        <a:t>▲505</a:t>
                       </a:r>
                       <a:endParaRPr lang="en-US" sz="1100" dirty="0">
                         <a:latin typeface="Meiryo" charset="0"/>
@@ -37551,7 +38235,7 @@
                           <a:ea typeface="Meiryo" pitchFamily="34" charset="-122"/>
                           <a:cs typeface="Meiryo" pitchFamily="34" charset="-120"/>
                         </a:rPr>
-                        <a:t>▲199</a:t>
+                        <a:t>▲100</a:t>
                       </a:r>
                       <a:endParaRPr lang="en-US" sz="1100" dirty="0">
                         <a:latin typeface="Meiryo" charset="0"/>
@@ -38538,7 +39222,7 @@
                 <a:ea typeface="Meiryo" pitchFamily="34" charset="-122"/>
                 <a:cs typeface="Meiryo" pitchFamily="34" charset="-120"/>
               </a:rPr>
-              <a:t>▲450万と▲649万。差は199万円です。同じだけ現金を使って、セラーのワインは1億から2億5,000万へ。しかもうち1億は、会員のお金で買われたワインです。</a:t>
+              <a:t>▲405万と▲505万。差は100万円です。同じだけ現金を使って、セラーのワインは1億から2億5,000万へ。しかもうち1億は、会員のお金で買われたワインです。</a:t>
             </a:r>
             <a:endParaRPr lang="en-US" sz="1050" dirty="0"/>
           </a:p>
@@ -38653,7 +39337,7 @@
                 <a:ea typeface="Meiryo" pitchFamily="34" charset="-122"/>
                 <a:cs typeface="Meiryo" pitchFamily="34" charset="-120"/>
               </a:rPr>
-              <a:t>自社で持つと 年▲450万（金利300＋保管150）。会員に持たせて預かると、現金ベースは▲64万（手数料250−保管150−マイル164）ですが、成功報酬が年169万発生します。差引 年+105万。同じワインで年555万ひっくり返ります。</a:t>
+              <a:t>自社で持つと 年▲405万（金利300＋保管105）。会員に持たせて預かると 年+13万（手数料250−保管105−マイル182＋オークション50）。成功報酬169万を含めれば +182万。同じワインで年587万ひっくり返ります。</a:t>
             </a:r>
             <a:endParaRPr lang="en-US" sz="1050" dirty="0"/>
           </a:p>
@@ -38880,7 +39564,7 @@
                 <a:ea typeface="Meiryo" pitchFamily="34" charset="-122"/>
                 <a:cs typeface="Meiryo" pitchFamily="34" charset="-120"/>
               </a:rPr>
-              <a:t>毎年1億円ずつ販売を続けた場合。単体ベース、マイル原価率44.5%。　※単位：万円</a:t>
+              <a:t>毎年1億円ずつ販売を続けた場合。単体ベース、還元率3.5/4.5/5.5%、マイル原価率43.6%。　※単位：万円</a:t>
             </a:r>
             <a:endParaRPr lang="en-US" sz="1050" dirty="0"/>
           </a:p>
@@ -39140,75 +39824,7 @@
                           <a:ea typeface="Meiryo" pitchFamily="34" charset="-122"/>
                           <a:cs typeface="Meiryo" pitchFamily="34" charset="-120"/>
                         </a:rPr>
-                        <a:t>管理手数料</a:t>
-                      </a:r>
-                      <a:endParaRPr lang="en-US" sz="1100" dirty="0">
-                        <a:latin typeface="Meiryo" charset="0"/>
-                        <a:ea typeface="Meiryo" charset="0"/>
-                        <a:cs typeface="Meiryo" charset="0"/>
-                      </a:endParaRPr>
-                    </a:p>
-                  </a:txBody>
-                  <a:tcPr marL="91440" marR="91440" marT="45720" marB="45720" anchor="ctr">
-                    <a:lnL w="9525" cap="flat" cmpd="sng" algn="ctr">
-                      <a:solidFill>
-                        <a:srgbClr val="4A3038"/>
-                      </a:solidFill>
-                      <a:prstDash val="solid"/>
-                      <a:round/>
-                      <a:headEnd type="none" w="med" len="med"/>
-                      <a:tailEnd type="none" w="med" len="med"/>
-                    </a:lnL>
-                    <a:lnR w="9525" cap="flat" cmpd="sng" algn="ctr">
-                      <a:solidFill>
-                        <a:srgbClr val="4A3038"/>
-                      </a:solidFill>
-                      <a:prstDash val="solid"/>
-                      <a:round/>
-                      <a:headEnd type="none" w="med" len="med"/>
-                      <a:tailEnd type="none" w="med" len="med"/>
-                    </a:lnR>
-                    <a:lnT w="9525" cap="flat" cmpd="sng" algn="ctr">
-                      <a:solidFill>
-                        <a:srgbClr val="4A3038"/>
-                      </a:solidFill>
-                      <a:prstDash val="solid"/>
-                      <a:round/>
-                      <a:headEnd type="none" w="med" len="med"/>
-                      <a:tailEnd type="none" w="med" len="med"/>
-                    </a:lnT>
-                    <a:lnB w="9525" cap="flat" cmpd="sng" algn="ctr">
-                      <a:solidFill>
-                        <a:srgbClr val="4A3038"/>
-                      </a:solidFill>
-                      <a:prstDash val="solid"/>
-                      <a:round/>
-                      <a:headEnd type="none" w="med" len="med"/>
-                      <a:tailEnd type="none" w="med" len="med"/>
-                    </a:lnB>
-                    <a:solidFill>
-                      <a:srgbClr val="7B1E3A"/>
-                    </a:solidFill>
-                  </a:tcPr>
-                </a:tc>
-                <a:tc>
-                  <a:txBody>
-                    <a:bodyPr/>
-                    <a:lstStyle/>
-                    <a:p>
-                      <a:pPr algn="ctr" indent="0" marL="0">
-                        <a:buNone/>
-                      </a:pPr>
-                      <a:r>
-                        <a:rPr lang="en-US" sz="1100" b="1" dirty="0">
-                          <a:solidFill>
-                            <a:srgbClr val="F2EDE6"/>
-                          </a:solidFill>
-                          <a:latin typeface="Meiryo" pitchFamily="34" charset="0"/>
-                          <a:ea typeface="Meiryo" pitchFamily="34" charset="-122"/>
-                          <a:cs typeface="Meiryo" pitchFamily="34" charset="-120"/>
-                        </a:rPr>
-                        <a:t>保管・保険</a:t>
+                        <a:t>手数料−保管</a:t>
                       </a:r>
                       <a:endParaRPr lang="en-US" sz="1100" dirty="0">
                         <a:latin typeface="Meiryo" charset="0"/>
@@ -39277,6 +39893,95 @@
                           <a:cs typeface="Meiryo" pitchFamily="34" charset="-120"/>
                         </a:rPr>
                         <a:t>マイル費用</a:t>
+                      </a:r>
+                      <a:endParaRPr lang="en-US" sz="1100" dirty="0">
+                        <a:latin typeface="Meiryo" charset="0"/>
+                        <a:ea typeface="Meiryo" charset="0"/>
+                        <a:cs typeface="Meiryo" charset="0"/>
+                      </a:endParaRPr>
+                    </a:p>
+                  </a:txBody>
+                  <a:tcPr marL="91440" marR="91440" marT="45720" marB="45720" anchor="ctr">
+                    <a:lnL w="9525" cap="flat" cmpd="sng" algn="ctr">
+                      <a:solidFill>
+                        <a:srgbClr val="4A3038"/>
+                      </a:solidFill>
+                      <a:prstDash val="solid"/>
+                      <a:round/>
+                      <a:headEnd type="none" w="med" len="med"/>
+                      <a:tailEnd type="none" w="med" len="med"/>
+                    </a:lnL>
+                    <a:lnR w="9525" cap="flat" cmpd="sng" algn="ctr">
+                      <a:solidFill>
+                        <a:srgbClr val="4A3038"/>
+                      </a:solidFill>
+                      <a:prstDash val="solid"/>
+                      <a:round/>
+                      <a:headEnd type="none" w="med" len="med"/>
+                      <a:tailEnd type="none" w="med" len="med"/>
+                    </a:lnR>
+                    <a:lnT w="9525" cap="flat" cmpd="sng" algn="ctr">
+                      <a:solidFill>
+                        <a:srgbClr val="4A3038"/>
+                      </a:solidFill>
+                      <a:prstDash val="solid"/>
+                      <a:round/>
+                      <a:headEnd type="none" w="med" len="med"/>
+                      <a:tailEnd type="none" w="med" len="med"/>
+                    </a:lnT>
+                    <a:lnB w="9525" cap="flat" cmpd="sng" algn="ctr">
+                      <a:solidFill>
+                        <a:srgbClr val="4A3038"/>
+                      </a:solidFill>
+                      <a:prstDash val="solid"/>
+                      <a:round/>
+                      <a:headEnd type="none" w="med" len="med"/>
+                      <a:tailEnd type="none" w="med" len="med"/>
+                    </a:lnB>
+                    <a:solidFill>
+                      <a:srgbClr val="7B1E3A"/>
+                    </a:solidFill>
+                  </a:tcPr>
+                </a:tc>
+                <a:tc>
+                  <a:txBody>
+                    <a:bodyPr/>
+                    <a:lstStyle/>
+                    <a:p>
+                      <a:pPr algn="ctr" indent="0" marL="0">
+                        <a:buNone/>
+                      </a:pPr>
+                      <a:r>
+                        <a:rPr lang="en-US" sz="1100" b="1" dirty="0">
+                          <a:solidFill>
+                            <a:srgbClr val="F2EDE6"/>
+                          </a:solidFill>
+                          <a:latin typeface="Meiryo" pitchFamily="34" charset="0"/>
+                          <a:ea typeface="Meiryo" pitchFamily="34" charset="-122"/>
+                          <a:cs typeface="Meiryo" pitchFamily="34" charset="-120"/>
+                        </a:rPr>
+                        <a:t>オーク</a:t>
+                      </a:r>
+                      <a:endParaRPr lang="en-US" sz="1100" dirty="0">
+                        <a:latin typeface="Meiryo" charset="0"/>
+                        <a:ea typeface="Meiryo" charset="0"/>
+                        <a:cs typeface="Meiryo" charset="0"/>
+                      </a:endParaRPr>
+                    </a:p>
+                    <a:p>
+                      <a:pPr algn="ctr" indent="0" marL="0">
+                        <a:buNone/>
+                      </a:pPr>
+                      <a:r>
+                        <a:rPr lang="en-US" sz="1100" b="1" dirty="0">
+                          <a:solidFill>
+                            <a:srgbClr val="F2EDE6"/>
+                          </a:solidFill>
+                          <a:latin typeface="Meiryo" pitchFamily="34" charset="0"/>
+                          <a:ea typeface="Meiryo" pitchFamily="34" charset="-122"/>
+                          <a:cs typeface="Meiryo" pitchFamily="34" charset="-120"/>
+                        </a:rPr>
+                        <a:t>ション</a:t>
                       </a:r>
                       <a:endParaRPr lang="en-US" sz="1100" dirty="0">
                         <a:latin typeface="Meiryo" charset="0"/>
@@ -39707,7 +40412,7 @@
                           <a:ea typeface="Meiryo" pitchFamily="34" charset="-122"/>
                           <a:cs typeface="Meiryo" pitchFamily="34" charset="-120"/>
                         </a:rPr>
-                        <a:t>+250</a:t>
+                        <a:t>+145</a:t>
                       </a:r>
                       <a:endParaRPr lang="en-US" sz="1100" dirty="0">
                         <a:latin typeface="Meiryo" charset="0"/>
@@ -39775,7 +40480,7 @@
                           <a:ea typeface="Meiryo" pitchFamily="34" charset="-122"/>
                           <a:cs typeface="Meiryo" pitchFamily="34" charset="-120"/>
                         </a:rPr>
-                        <a:t>▲150</a:t>
+                        <a:t>▲182</a:t>
                       </a:r>
                       <a:endParaRPr lang="en-US" sz="1100" dirty="0">
                         <a:latin typeface="Meiryo" charset="0"/>
@@ -39837,13 +40542,13 @@
                       <a:r>
                         <a:rPr lang="en-US" sz="1100" dirty="0">
                           <a:solidFill>
-                            <a:srgbClr val="E0A458"/>
+                            <a:srgbClr val="7FD1AE"/>
                           </a:solidFill>
                           <a:latin typeface="Meiryo" pitchFamily="34" charset="0"/>
                           <a:ea typeface="Meiryo" pitchFamily="34" charset="-122"/>
                           <a:cs typeface="Meiryo" pitchFamily="34" charset="-120"/>
                         </a:rPr>
-                        <a:t>▲164</a:t>
+                        <a:t>+50</a:t>
                       </a:r>
                       <a:endParaRPr lang="en-US" sz="1100" dirty="0">
                         <a:latin typeface="Meiryo" charset="0"/>
@@ -39979,7 +40684,7 @@
                           <a:ea typeface="Meiryo" pitchFamily="34" charset="-122"/>
                           <a:cs typeface="Meiryo" pitchFamily="34" charset="-120"/>
                         </a:rPr>
-                        <a:t>+3,086</a:t>
+                        <a:t>+3,163</a:t>
                       </a:r>
                       <a:endParaRPr lang="en-US" sz="1100" dirty="0">
                         <a:latin typeface="Meiryo" charset="0"/>
@@ -40253,7 +40958,7 @@
                           <a:ea typeface="Meiryo" pitchFamily="34" charset="-122"/>
                           <a:cs typeface="Meiryo" pitchFamily="34" charset="-120"/>
                         </a:rPr>
-                        <a:t>+750</a:t>
+                        <a:t>+435</a:t>
                       </a:r>
                       <a:endParaRPr lang="en-US" sz="1100" dirty="0">
                         <a:latin typeface="Meiryo" charset="0"/>
@@ -40321,7 +41026,7 @@
                           <a:ea typeface="Meiryo" pitchFamily="34" charset="-122"/>
                           <a:cs typeface="Meiryo" pitchFamily="34" charset="-120"/>
                         </a:rPr>
-                        <a:t>▲450</a:t>
+                        <a:t>▲546</a:t>
                       </a:r>
                       <a:endParaRPr lang="en-US" sz="1100" dirty="0">
                         <a:latin typeface="Meiryo" charset="0"/>
@@ -40383,13 +41088,13 @@
                       <a:r>
                         <a:rPr lang="en-US" sz="1100" dirty="0">
                           <a:solidFill>
-                            <a:srgbClr val="E0A458"/>
+                            <a:srgbClr val="7FD1AE"/>
                           </a:solidFill>
                           <a:latin typeface="Meiryo" pitchFamily="34" charset="0"/>
                           <a:ea typeface="Meiryo" pitchFamily="34" charset="-122"/>
                           <a:cs typeface="Meiryo" pitchFamily="34" charset="-120"/>
                         </a:rPr>
-                        <a:t>▲491</a:t>
+                        <a:t>+150</a:t>
                       </a:r>
                       <a:endParaRPr lang="en-US" sz="1100" dirty="0">
                         <a:latin typeface="Meiryo" charset="0"/>
@@ -40525,7 +41230,7 @@
                           <a:ea typeface="Meiryo" pitchFamily="34" charset="-122"/>
                           <a:cs typeface="Meiryo" pitchFamily="34" charset="-120"/>
                         </a:rPr>
-                        <a:t>+3,259</a:t>
+                        <a:t>+3,489</a:t>
                       </a:r>
                       <a:endParaRPr lang="en-US" sz="1100" dirty="0">
                         <a:latin typeface="Meiryo" charset="0"/>
@@ -40799,7 +41504,7 @@
                           <a:ea typeface="Meiryo" pitchFamily="34" charset="-122"/>
                           <a:cs typeface="Meiryo" pitchFamily="34" charset="-120"/>
                         </a:rPr>
-                        <a:t>+1,250</a:t>
+                        <a:t>+725</a:t>
                       </a:r>
                       <a:endParaRPr lang="en-US" sz="1100" dirty="0">
                         <a:latin typeface="Meiryo" charset="0"/>
@@ -40867,7 +41572,7 @@
                           <a:ea typeface="Meiryo" pitchFamily="34" charset="-122"/>
                           <a:cs typeface="Meiryo" pitchFamily="34" charset="-120"/>
                         </a:rPr>
-                        <a:t>▲750</a:t>
+                        <a:t>▲910</a:t>
                       </a:r>
                       <a:endParaRPr lang="en-US" sz="1100" dirty="0">
                         <a:latin typeface="Meiryo" charset="0"/>
@@ -40929,13 +41634,13 @@
                       <a:r>
                         <a:rPr lang="en-US" sz="1100" dirty="0">
                           <a:solidFill>
-                            <a:srgbClr val="E0A458"/>
+                            <a:srgbClr val="7FD1AE"/>
                           </a:solidFill>
                           <a:latin typeface="Meiryo" pitchFamily="34" charset="0"/>
                           <a:ea typeface="Meiryo" pitchFamily="34" charset="-122"/>
                           <a:cs typeface="Meiryo" pitchFamily="34" charset="-120"/>
                         </a:rPr>
-                        <a:t>▲819</a:t>
+                        <a:t>+250</a:t>
                       </a:r>
                       <a:endParaRPr lang="en-US" sz="1100" dirty="0">
                         <a:latin typeface="Meiryo" charset="0"/>
@@ -41071,7 +41776,7 @@
                           <a:ea typeface="Meiryo" pitchFamily="34" charset="-122"/>
                           <a:cs typeface="Meiryo" pitchFamily="34" charset="-120"/>
                         </a:rPr>
-                        <a:t>+3,431</a:t>
+                        <a:t>+3,815</a:t>
                       </a:r>
                       <a:endParaRPr lang="en-US" sz="1100" dirty="0">
                         <a:latin typeface="Meiryo" charset="0"/>
@@ -41345,7 +42050,7 @@
                           <a:ea typeface="Meiryo" pitchFamily="34" charset="-122"/>
                           <a:cs typeface="Meiryo" pitchFamily="34" charset="-120"/>
                         </a:rPr>
-                        <a:t>+2,500</a:t>
+                        <a:t>+1,450</a:t>
                       </a:r>
                       <a:endParaRPr lang="en-US" sz="1100" dirty="0">
                         <a:latin typeface="Meiryo" charset="0"/>
@@ -41413,7 +42118,7 @@
                           <a:ea typeface="Meiryo" pitchFamily="34" charset="-122"/>
                           <a:cs typeface="Meiryo" pitchFamily="34" charset="-120"/>
                         </a:rPr>
-                        <a:t>▲1,500</a:t>
+                        <a:t>▲1,820</a:t>
                       </a:r>
                       <a:endParaRPr lang="en-US" sz="1100" dirty="0">
                         <a:latin typeface="Meiryo" charset="0"/>
@@ -41475,13 +42180,13 @@
                       <a:r>
                         <a:rPr lang="en-US" sz="1100" dirty="0">
                           <a:solidFill>
-                            <a:srgbClr val="E0A458"/>
+                            <a:srgbClr val="7FD1AE"/>
                           </a:solidFill>
                           <a:latin typeface="Meiryo" pitchFamily="34" charset="0"/>
                           <a:ea typeface="Meiryo" pitchFamily="34" charset="-122"/>
                           <a:cs typeface="Meiryo" pitchFamily="34" charset="-120"/>
                         </a:rPr>
-                        <a:t>▲1,638</a:t>
+                        <a:t>+500</a:t>
                       </a:r>
                       <a:endParaRPr lang="en-US" sz="1100" dirty="0">
                         <a:latin typeface="Meiryo" charset="0"/>
@@ -41617,7 +42322,7 @@
                           <a:ea typeface="Meiryo" pitchFamily="34" charset="-122"/>
                           <a:cs typeface="Meiryo" pitchFamily="34" charset="-120"/>
                         </a:rPr>
-                        <a:t>+3,862</a:t>
+                        <a:t>+4,630</a:t>
                       </a:r>
                       <a:endParaRPr lang="en-US" sz="1100" dirty="0">
                         <a:latin typeface="Meiryo" charset="0"/>
@@ -41740,7 +42445,7 @@
                 <a:ea typeface="Meiryo" pitchFamily="34" charset="-122"/>
                 <a:cs typeface="Meiryo" pitchFamily="34" charset="-120"/>
               </a:rPr>
-              <a:t>マイルの原資は、管理手数料ではなく成功報酬です。</a:t>
+              <a:t>手数料だけでは足りない。だから3つで支えます。</a:t>
             </a:r>
             <a:endParaRPr lang="en-US" sz="1500" dirty="0"/>
           </a:p>
@@ -41782,7 +42487,7 @@
                 <a:ea typeface="Meiryo" pitchFamily="34" charset="-122"/>
                 <a:cs typeface="Meiryo" pitchFamily="34" charset="-120"/>
               </a:rPr>
-              <a:t>手数料2.5%から保管1.5%を引くと残りは1.0%。マイル1.64%はこれを超えます。埋めているのは値上がり益25%（年1.5%相当）。先に出して、値上がりで回収する構造です。</a:t>
+              <a:t>手数料2.5%から保管1.05%（鈴与実額210円/本）を引くと残りは1.45%。マイル1.82%はこれを超えます。差を埋めるのがオークション手数料0.5%と、値上がり益25%（年1.5%相当）です。</a:t>
             </a:r>
             <a:endParaRPr lang="en-US" sz="1050" dirty="0"/>
           </a:p>
@@ -41897,7 +42602,7 @@
                 <a:ea typeface="Meiryo" pitchFamily="34" charset="-122"/>
                 <a:cs typeface="Meiryo" pitchFamily="34" charset="-120"/>
               </a:rPr>
-              <a:t>手数料2.5%・保管1.5%・マイル1.64%・成功報酬1.5%。全部が定率なので、規模が何倍になっても差引0.86%は動きません。手出しが収入を追い越す構造になっていません。</a:t>
+              <a:t>手数料2.5%・保管1.05%・マイル1.82%・オークション0.5%・成功報酬1.5%。全部が定率なので、規模が何倍になっても差引1.63%は動きません。手出しが収入を追い越す構造ではありません。</a:t>
             </a:r>
             <a:endParaRPr lang="en-US" sz="1050" dirty="0"/>
           </a:p>
@@ -41970,7 +42675,7 @@
                 <a:ea typeface="Meiryo" pitchFamily="34" charset="-122"/>
                 <a:cs typeface="Meiryo" pitchFamily="34" charset="-120"/>
               </a:rPr>
-              <a:t>ただし現金ベースでは年▲64万。成功報酬は出口までキャッシュになりません。ここは資金繰りとして別途見る必要があります。</a:t>
+              <a:t>現金ベースでも年+13万。ただし成功報酬169万は出口までキャッシュになりません。資金繰りは別途見る必要があります。</a:t>
             </a:r>
             <a:endParaRPr lang="en-US" sz="1350" dirty="0"/>
           </a:p>

--- a/提案資料/WineBank_ワインマイル経済圏構想_黒背景版.pptx
+++ b/提案資料/WineBank_ワインマイル経済圏構想_黒背景版.pptx
@@ -1143,7 +1143,7 @@
           <a:p>
             <a:r>
               <a:rPr lang="en-US" dirty="0"/>
-              <a:t>マイルの有効期限は無償付与であれば自由に設定できる（資金決済法の前払式支払手段に該当しないため）。JALマイル36ヶ月・楽天1年と同様。</a:t>
+              <a:t>マイルの有効期限は無償付与であれば自由に設定できる（資金決済法の前払式支払手段に該当しないため）。JALマイル36ヶ月・楽天1年と同様。ただし消費者契約法10条により、事前告知なく一方的に失効させる条項は無効となり得るため、失効の30日前予告を規約とシステムの両方に組み込む。</a:t>
             </a:r>
             <a:endParaRPr lang="en-US" dirty="0"/>
           </a:p>
@@ -1847,7 +1847,7 @@
           <a:p>
             <a:r>
               <a:rPr lang="en-US" dirty="0"/>
-              <a:t>6ヶ月ルールは撤回。無償付与のマイルは前払式支払手段に該当しないため、期限は自由。</a:t>
+              <a:t>岩田合同法律事務所（大櫛・関口・國本）2026年9月回答。残る宿題は3点：①マイルを有償で販売する導線は本意見書の対象外であり、対価性が生じるため前払式支払手段に該当する。実装する場合は別途照会が必要 ②賃料を役務提供で充当する場合の契約書文言 ③マイル無償付与の課税整理（税理士）。</a:t>
             </a:r>
             <a:endParaRPr lang="en-US" dirty="0"/>
           </a:p>
@@ -2727,7 +2727,7 @@
           <a:p>
             <a:r>
               <a:rPr lang="en-US" dirty="0"/>
-              <a:t>純粋サブリース（値上がり全取り）は買戻し義務を伴い収益認識で詰む。2契約に分けることで、法務・会計・マーケの3つが同時に立つ。</a:t>
+              <a:t>純粋サブリース（値上がり全取り）は買戻し義務を伴い収益認識で詰む。2契約に分けることで、法務・会計・マーケの3つが同時に立つ。／2026年9月の弁護士意見書により、マイルを賃貸借の対価（賃料）として発行すると資金決済法の前払式支払手段に該当し得るため、賃料は役務提供で充当し、マイルは管理手数料に対する無償付与として整理する。</a:t>
             </a:r>
             <a:endParaRPr lang="en-US" dirty="0"/>
           </a:p>
@@ -16472,7 +16472,7 @@
                 <a:ea typeface="Meiryo" pitchFamily="34" charset="-122"/>
                 <a:cs typeface="Meiryo" pitchFamily="34" charset="-120"/>
               </a:rPr>
-              <a:t>ワインは当社が賃借し、マイルが賃料として入る</a:t>
+              <a:t>ワインは当社が賃借（賃料は役務で充当）</a:t>
             </a:r>
             <a:endParaRPr lang="en-US" sz="1150" dirty="0"/>
           </a:p>
@@ -16496,7 +16496,7 @@
                 <a:ea typeface="Meiryo" pitchFamily="34" charset="-122"/>
                 <a:cs typeface="Meiryo" pitchFamily="34" charset="-120"/>
               </a:rPr>
-              <a:t>値上がりの75%は会員のもの</a:t>
+              <a:t>マイルは管理手数料に対する無償付与</a:t>
             </a:r>
             <a:endParaRPr lang="en-US" sz="1150" dirty="0"/>
           </a:p>
@@ -16520,7 +16520,7 @@
                 <a:ea typeface="Meiryo" pitchFamily="34" charset="-122"/>
                 <a:cs typeface="Meiryo" pitchFamily="34" charset="-120"/>
               </a:rPr>
-              <a:t>出口は自由。縛りなし</a:t>
+              <a:t>値上がりの75%は会員のもの。出口は自由</a:t>
             </a:r>
             <a:endParaRPr lang="en-US" sz="1150" dirty="0"/>
           </a:p>
@@ -17461,7 +17461,7 @@
                 <a:ea typeface="Meiryo" pitchFamily="34" charset="-122"/>
                 <a:cs typeface="Meiryo" pitchFamily="34" charset="-120"/>
               </a:rPr>
-              <a:t>保有資産に比例した年次付与（保有残高×5%）</a:t>
+              <a:t>管理手数料に対する無償付与（簿価×3.5〜5.5%）</a:t>
             </a:r>
             <a:endParaRPr lang="en-US" sz="1100" dirty="0"/>
           </a:p>
@@ -30493,7 +30493,7 @@
                 <a:ea typeface="Arial" pitchFamily="34" charset="-122"/>
                 <a:cs typeface="Arial" pitchFamily="34" charset="-120"/>
               </a:rPr>
-              <a:t>RISK CONTROL</a:t>
+              <a:t>LEGAL</a:t>
             </a:r>
             <a:endParaRPr lang="en-US" sz="1050" dirty="0"/>
           </a:p>
@@ -30532,7 +30532,7 @@
                 <a:ea typeface="Meiryo" pitchFamily="34" charset="-122"/>
                 <a:cs typeface="Meiryo" pitchFamily="34" charset="-120"/>
               </a:rPr>
-              <a:t>先に塞ぐ：4つのリスク</a:t>
+              <a:t>法務確認済み：実施できます</a:t>
             </a:r>
             <a:endParaRPr lang="en-US" sz="2900" dirty="0"/>
           </a:p>
@@ -30571,7 +30571,7 @@
                 <a:ea typeface="Meiryo" pitchFamily="34" charset="-122"/>
                 <a:cs typeface="Meiryo" pitchFamily="34" charset="-120"/>
               </a:rPr>
-              <a:t>攻める前に、法務・税務・会計を設計に織り込みます。</a:t>
+              <a:t>岩田合同法律事務所より2026年9月に回答を取得。「法律上の問題なく実施できる」との結論です。</a:t>
             </a:r>
             <a:endParaRPr lang="en-US" sz="1300" dirty="0"/>
           </a:p>
@@ -30747,7 +30747,7 @@
                 <a:ea typeface="Meiryo" pitchFamily="34" charset="-122"/>
                 <a:cs typeface="Meiryo" pitchFamily="34" charset="-120"/>
               </a:rPr>
-              <a:t>出資法・景表法</a:t>
+              <a:t>資金決済法</a:t>
             </a:r>
             <a:endParaRPr lang="en-US" sz="1400" dirty="0"/>
           </a:p>
@@ -30786,7 +30786,7 @@
                 <a:ea typeface="Meiryo" pitchFamily="34" charset="-122"/>
                 <a:cs typeface="Meiryo" pitchFamily="34" charset="-120"/>
               </a:rPr>
-              <a:t>「年率5%」と言わない</a:t>
+              <a:t>無償付与なら該当しない</a:t>
             </a:r>
             <a:endParaRPr lang="en-US" sz="1300" dirty="0"/>
           </a:p>
@@ -30828,7 +30828,7 @@
                 <a:ea typeface="Meiryo" pitchFamily="34" charset="-122"/>
                 <a:cs typeface="Meiryo" pitchFamily="34" charset="-120"/>
               </a:rPr>
-              <a:t>「預ける＋年率＋貯金」の組合せは預り金と読まれます。マスターリース（動産賃貸借）の建て付けにし、5%は『賃料率』として説明する。商標『ワイン貯金』は競合を止めますが、法規制は止めません。</a:t>
+              <a:t>無償で発行する限り前払式支払手段には該当せず、届出も供託も不要です。ただしマイルを賃貸借の『賃料』として発行すると対価性が生じ該当し得るため、管理手数料に対するおまけとしての無償付与に整理を統一します。</a:t>
             </a:r>
             <a:endParaRPr lang="en-US" sz="1050" dirty="0"/>
           </a:p>
@@ -30965,7 +30965,7 @@
                 <a:ea typeface="Meiryo" pitchFamily="34" charset="-122"/>
                 <a:cs typeface="Meiryo" pitchFamily="34" charset="-120"/>
               </a:rPr>
-              <a:t>資金決済法</a:t>
+              <a:t>出資法・銀行法</a:t>
             </a:r>
             <a:endParaRPr lang="en-US" sz="1400" dirty="0"/>
           </a:p>
@@ -31004,7 +31004,7 @@
                 <a:ea typeface="Meiryo" pitchFamily="34" charset="-122"/>
                 <a:cs typeface="Meiryo" pitchFamily="34" charset="-120"/>
               </a:rPr>
-              <a:t>マイルを「売る」と性質が変わる</a:t>
+              <a:t>そもそも該当しない</a:t>
             </a:r>
             <a:endParaRPr lang="en-US" sz="1300" dirty="0"/>
           </a:p>
@@ -31046,7 +31046,7 @@
                 <a:ea typeface="Meiryo" pitchFamily="34" charset="-122"/>
                 <a:cs typeface="Meiryo" pitchFamily="34" charset="-120"/>
               </a:rPr>
-              <a:t>無償付与なら前払式支払手段に該当せず、期限も自由です。ただしマイルを購入できる設計にすると対価性が生じて該当し、届出＋供託（未使用残高の半額）が必要になります。購入導線は法務確認後に判断します。</a:t>
+              <a:t>預かるのはワインであり金銭ではないため、『預金』『預り金』の4要件を満たしません。当初懸念していた「年率と言わない」という制約は不要になりました。</a:t>
             </a:r>
             <a:endParaRPr lang="en-US" sz="1050" dirty="0"/>
           </a:p>
@@ -31183,7 +31183,7 @@
                 <a:ea typeface="Meiryo" pitchFamily="34" charset="-122"/>
                 <a:cs typeface="Meiryo" pitchFamily="34" charset="-120"/>
               </a:rPr>
-              <a:t>課税</a:t>
+              <a:t>景品表示法</a:t>
             </a:r>
             <a:endParaRPr lang="en-US" sz="1400" dirty="0"/>
           </a:p>
@@ -31222,7 +31222,7 @@
                 <a:ea typeface="Meiryo" pitchFamily="34" charset="-122"/>
                 <a:cs typeface="Meiryo" pitchFamily="34" charset="-120"/>
               </a:rPr>
-              <a:t>マイレージ還元として構成</a:t>
+              <a:t>値引と整理され、還元率に上限はない</a:t>
             </a:r>
             <a:endParaRPr lang="en-US" sz="1300" dirty="0"/>
           </a:p>
@@ -31264,7 +31264,7 @@
                 <a:ea typeface="Meiryo" pitchFamily="34" charset="-122"/>
                 <a:cs typeface="Meiryo" pitchFamily="34" charset="-120"/>
               </a:rPr>
-              <a:t>クレジットカードのマイル還元は法人・個人とも課税されないのが実務です。ただし本件は賃料としての性格も併存するため、規約の文言で決まります。ローンチ前に顧問税理士の一筆を。</a:t>
+              <a:t>自社でのみ使えるマイルは『正常な商慣習に照らして値引』にあたり景品類に該当しません。実質50%値引を許容する消費者庁Q&amp;Aもあり、3.5〜5.5%は論点になりません。ただし表示は正確に。</a:t>
             </a:r>
             <a:endParaRPr lang="en-US" sz="1050" dirty="0"/>
           </a:p>
@@ -31401,7 +31401,7 @@
                 <a:ea typeface="Meiryo" pitchFamily="34" charset="-122"/>
                 <a:cs typeface="Meiryo" pitchFamily="34" charset="-120"/>
               </a:rPr>
-              <a:t>会計</a:t>
+              <a:t>消費者契約法</a:t>
             </a:r>
             <a:endParaRPr lang="en-US" sz="1400" dirty="0"/>
           </a:p>
@@ -31440,7 +31440,7 @@
                 <a:ea typeface="Meiryo" pitchFamily="34" charset="-122"/>
                 <a:cs typeface="Meiryo" pitchFamily="34" charset="-120"/>
               </a:rPr>
-              <a:t>買戻しを採らない理由</a:t>
+              <a:t>事前告知なき失効は無効になり得る</a:t>
             </a:r>
             <a:endParaRPr lang="en-US" sz="1300" dirty="0"/>
           </a:p>
@@ -31482,7 +31482,7 @@
                 <a:ea typeface="Meiryo" pitchFamily="34" charset="-122"/>
                 <a:cs typeface="Meiryo" pitchFamily="34" charset="-120"/>
               </a:rPr>
-              <a:t>買戻し保証があるとリスクと経済価値が移転せず、100万円を売上計上できません。成功報酬方式ならこの論点自体が消えます。マイルは履行義務として繰延が必要です。</a:t>
+              <a:t>大量に貯まったマイルを予告なく失効させる条項は法10条で無効となり得ます。付与・利用・変更手続・トラブル対応・譲渡可否・終了時対応の6点を規約に明記し公表します（経産省ガイドライン）。</a:t>
             </a:r>
             <a:endParaRPr lang="en-US" sz="1050" dirty="0"/>
           </a:p>
@@ -35759,7 +35759,7 @@
                 <a:ea typeface="Meiryo" pitchFamily="34" charset="-122"/>
                 <a:cs typeface="Meiryo" pitchFamily="34" charset="-120"/>
               </a:rPr>
-              <a:t>弁護士・税理士への確認</a:t>
+              <a:t>残る法務・税務の宿題</a:t>
             </a:r>
             <a:endParaRPr lang="en-US" sz="1350" dirty="0"/>
           </a:p>
@@ -35801,7 +35801,7 @@
                 <a:ea typeface="Meiryo" pitchFamily="34" charset="-122"/>
                 <a:cs typeface="Meiryo" pitchFamily="34" charset="-120"/>
               </a:rPr>
-              <a:t>①賃貸借＋AM契約が出資法・金商法の枠外にあること ②マイルの無償付与としての整理と課税 ③古物競りあっせん業者の届出要否</a:t>
+              <a:t>①マイル利用規約の整備（経産省ガイドラインの6項目）②賃料を役務で充当する契約書文言 ③無償付与マイルの課税整理（税理士）④古物競りあっせん業者の届出要否</a:t>
             </a:r>
             <a:endParaRPr lang="en-US" sz="1050" dirty="0"/>
           </a:p>
@@ -46059,7 +46059,7 @@
                 <a:ea typeface="Meiryo" pitchFamily="34" charset="-122"/>
                 <a:cs typeface="Meiryo" pitchFamily="34" charset="-120"/>
               </a:rPr>
-              <a:t>賃料：ワインマイル 年5%</a:t>
+              <a:t>賃料：保管・保険・管理の役務提供</a:t>
             </a:r>
             <a:endParaRPr lang="en-US" sz="2000" dirty="0"/>
           </a:p>
@@ -46129,7 +46129,7 @@
                 <a:ea typeface="Meiryo" pitchFamily="34" charset="-122"/>
                 <a:cs typeface="Meiryo" pitchFamily="34" charset="-120"/>
               </a:rPr>
-              <a:t>賃料は現金ではなくワインマイルで支払う</a:t>
+              <a:t>賃料は保管・保険・真正性管理の役務で充当する</a:t>
             </a:r>
             <a:endParaRPr lang="en-US" sz="1150" dirty="0"/>
           </a:p>
@@ -46153,7 +46153,7 @@
                 <a:ea typeface="Meiryo" pitchFamily="34" charset="-122"/>
                 <a:cs typeface="Meiryo" pitchFamily="34" charset="-120"/>
               </a:rPr>
-              <a:t>「5%」は利回りではなく賃料率</a:t>
+              <a:t>マイルは賃料ではない（LEGAL 参照）</a:t>
             </a:r>
             <a:endParaRPr lang="en-US" sz="1150" dirty="0"/>
           </a:p>
@@ -46432,7 +46432,7 @@
                 <a:ea typeface="Meiryo" pitchFamily="34" charset="-122"/>
                 <a:cs typeface="Meiryo" pitchFamily="34" charset="-120"/>
               </a:rPr>
-              <a:t>不動産のファンドと同じ形です。マスターリース会社が保証賃料を払い、AM会社が運用報酬とディスポジションフィーを取る。</a:t>
+              <a:t>不動産のファンドと同じ形です。マスターリース会社が借りて運用し、AM会社が運用報酬とディスポジションフィーを取る。</a:t>
             </a:r>
             <a:endParaRPr lang="en-US" sz="1350" dirty="0"/>
           </a:p>
@@ -46544,7 +46544,7 @@
                 <a:ea typeface="Meiryo" pitchFamily="34" charset="-122"/>
                 <a:cs typeface="Meiryo" pitchFamily="34" charset="-120"/>
               </a:rPr>
-              <a:t>賃料5%は当社が払う。値上がりの75%は会員のもの。当社の取り分は25%だけ。</a:t>
+              <a:t>マイルは賃料ではありません。値上がりの75%は会員のもの。当社の取り分は25%だけ。</a:t>
             </a:r>
             <a:endParaRPr lang="en-US" sz="1700" dirty="0"/>
           </a:p>
